--- a/presentation_slides.pptx
+++ b/presentation_slides.pptx
@@ -1857,7 +1857,7 @@
         </p:nvSpPr>
         <p:spPr>
           <a:xfrm>
-            <a:off x="6537960" y="2839212"/>
+            <a:off x="6556248" y="2909693"/>
             <a:ext cx="3017520" cy="228600"/>
           </a:xfrm>
           <a:prstGeom prst="rect">
@@ -1893,7 +1893,7 @@
         </p:nvSpPr>
         <p:spPr>
           <a:xfrm>
-            <a:off x="6556248" y="3332988"/>
+            <a:off x="6574536" y="3403469"/>
             <a:ext cx="91440" cy="91440"/>
           </a:xfrm>
           <a:prstGeom prst="ellipse">
@@ -1918,7 +1918,7 @@
         </p:nvSpPr>
         <p:spPr>
           <a:xfrm>
-            <a:off x="6757416" y="3259836"/>
+            <a:off x="6775704" y="3330317"/>
             <a:ext cx="4297680" cy="384048"/>
           </a:xfrm>
           <a:prstGeom prst="rect">
@@ -1959,7 +1959,7 @@
         </p:nvSpPr>
         <p:spPr>
           <a:xfrm>
-            <a:off x="6556248" y="3854196"/>
+            <a:off x="6574536" y="3924677"/>
             <a:ext cx="91440" cy="91440"/>
           </a:xfrm>
           <a:prstGeom prst="ellipse">
@@ -1984,7 +1984,7 @@
         </p:nvSpPr>
         <p:spPr>
           <a:xfrm>
-            <a:off x="6757416" y="3781044"/>
+            <a:off x="6775704" y="3851525"/>
             <a:ext cx="4297680" cy="384048"/>
           </a:xfrm>
           <a:prstGeom prst="rect">
@@ -1995,7 +1995,7 @@
         </p:spPr>
         <p:txBody>
           <a:bodyPr wrap="square" lIns="254" tIns="254" rIns="254" bIns="254" rtlCol="0" anchor="ctr">
-            <a:normAutofit fontScale="85000" lnSpcReduction="20000"/>
+            <a:noAutofit/>
           </a:bodyPr>
           <a:lstStyle/>
           <a:p>
@@ -2003,7 +2003,7 @@
               <a:buNone/>
             </a:pPr>
             <a:r>
-              <a:rPr lang="en-US" sz="1800" dirty="0">
+              <a:rPr lang="en-US" dirty="0">
                 <a:solidFill>
                   <a:srgbClr val="0F2F25"/>
                 </a:solidFill>
@@ -2013,150 +2013,105 @@
               </a:rPr>
               <a:t>Willingness to pay for three more good-air-quality days</a:t>
             </a:r>
-            <a:endParaRPr lang="en-US" sz="1800" dirty="0"/>
-          </a:p>
-        </p:txBody>
-      </p:sp>
-      <p:sp>
-        <p:nvSpPr>
-          <p:cNvPr id="10" name="Shape 8"/>
-          <p:cNvSpPr/>
-          <p:nvPr/>
-        </p:nvSpPr>
-        <p:spPr>
-          <a:xfrm>
-            <a:off x="6556248" y="4375404"/>
-            <a:ext cx="91440" cy="91440"/>
-          </a:xfrm>
-          <a:prstGeom prst="ellipse">
-            <a:avLst/>
-          </a:prstGeom>
-          <a:solidFill>
-            <a:srgbClr val="0B5D3B"/>
-          </a:solidFill>
-          <a:ln w="12700">
-            <a:solidFill>
-              <a:srgbClr val="0B5D3B"/>
-            </a:solidFill>
-            <a:prstDash val="solid"/>
-          </a:ln>
-        </p:spPr>
-      </p:sp>
-      <p:sp>
-        <p:nvSpPr>
-          <p:cNvPr id="11" name="Text 9"/>
-          <p:cNvSpPr/>
-          <p:nvPr/>
-        </p:nvSpPr>
-        <p:spPr>
-          <a:xfrm>
-            <a:off x="6757416" y="4302252"/>
-            <a:ext cx="4892040" cy="384048"/>
-          </a:xfrm>
-          <a:prstGeom prst="rect">
-            <a:avLst/>
-          </a:prstGeom>
-          <a:noFill/>
-          <a:ln/>
-        </p:spPr>
-        <p:txBody>
-          <a:bodyPr wrap="square" lIns="254" tIns="254" rIns="254" bIns="254" rtlCol="0" anchor="ctr">
-            <a:normAutofit fontScale="92500" lnSpcReduction="20000"/>
-          </a:bodyPr>
-          <a:lstStyle/>
-          <a:p>
-            <a:pPr marL="0" indent="0">
-              <a:buNone/>
-            </a:pPr>
-            <a:r>
-              <a:rPr lang="en-US" sz="1600" dirty="0">
-                <a:solidFill>
-                  <a:srgbClr val="0F2F25"/>
-                </a:solidFill>
-                <a:latin typeface="Aptos" pitchFamily="34" charset="0"/>
-                <a:ea typeface="Aptos" pitchFamily="34" charset="-122"/>
-                <a:cs typeface="Aptos" pitchFamily="34" charset="-120"/>
-              </a:rPr>
-              <a:t>Controls: age, gender, education, income, health, hukou, marriage, CCP membership, community type</a:t>
-            </a:r>
-            <a:endParaRPr lang="en-US" sz="1600" dirty="0"/>
-          </a:p>
-        </p:txBody>
-      </p:sp>
-      <p:sp>
-        <p:nvSpPr>
-          <p:cNvPr id="12" name="Text 10"/>
-          <p:cNvSpPr/>
-          <p:nvPr/>
-        </p:nvSpPr>
-        <p:spPr>
-          <a:xfrm>
-            <a:off x="6537960" y="1298448"/>
-            <a:ext cx="2743200" cy="228600"/>
-          </a:xfrm>
-          <a:prstGeom prst="rect">
-            <a:avLst/>
-          </a:prstGeom>
-          <a:noFill/>
-          <a:ln/>
-        </p:spPr>
-        <p:txBody>
-          <a:bodyPr wrap="square" lIns="0" tIns="0" rIns="0" bIns="0" rtlCol="0" anchor="ctr"/>
-          <a:lstStyle/>
-          <a:p>
-            <a:pPr marL="0" indent="0">
-              <a:buNone/>
-            </a:pPr>
-            <a:r>
-              <a:rPr lang="en-US" sz="1700" b="1" dirty="0">
-                <a:solidFill>
-                  <a:srgbClr val="1F77B4"/>
-                </a:solidFill>
-              </a:rPr>
-              <a:t>Main exposure</a:t>
-            </a:r>
-            <a:endParaRPr lang="en-US" sz="1700" dirty="0"/>
-          </a:p>
-        </p:txBody>
-      </p:sp>
-      <p:sp>
-        <p:nvSpPr>
-          <p:cNvPr id="13" name="Text 11"/>
-          <p:cNvSpPr/>
-          <p:nvPr/>
-        </p:nvSpPr>
-        <p:spPr>
-          <a:xfrm>
-            <a:off x="6537960" y="1719072"/>
-            <a:ext cx="4800600" cy="841248"/>
-          </a:xfrm>
-          <a:prstGeom prst="rect">
-            <a:avLst/>
-          </a:prstGeom>
-          <a:noFill/>
-          <a:ln/>
-        </p:spPr>
-        <p:txBody>
-          <a:bodyPr wrap="square" lIns="254" tIns="254" rIns="254" bIns="254" rtlCol="0" anchor="ctr">
-            <a:normAutofit lnSpcReduction="10000"/>
-          </a:bodyPr>
-          <a:lstStyle/>
-          <a:p>
-            <a:pPr marL="0" indent="0">
-              <a:buNone/>
-            </a:pPr>
-            <a:r>
-              <a:rPr lang="en-US" sz="2000" b="1" dirty="0">
-                <a:solidFill>
-                  <a:srgbClr val="0F2F25"/>
-                </a:solidFill>
-              </a:rPr>
-              <a:t>Province-level annual mean NDVI from NASA Harmonized Landsat–Sentinel vegetation products.</a:t>
-            </a:r>
-            <a:endParaRPr lang="en-US" sz="2000" dirty="0"/>
-          </a:p>
-        </p:txBody>
-      </p:sp>
+            <a:endParaRPr lang="en-US" dirty="0"/>
+          </a:p>
+        </p:txBody>
+      </p:sp>
+      <p:grpSp>
+        <p:nvGrpSpPr>
+          <p:cNvPr id="22" name="组合 21">
+            <a:extLst>
+              <a:ext uri="{FF2B5EF4-FFF2-40B4-BE49-F238E27FC236}">
+                <a16:creationId xmlns:a16="http://schemas.microsoft.com/office/drawing/2014/main" id="{57DAE92E-036F-E10D-8215-D1862765D336}"/>
+              </a:ext>
+            </a:extLst>
+          </p:cNvPr>
+          <p:cNvGrpSpPr/>
+          <p:nvPr/>
+        </p:nvGrpSpPr>
+        <p:grpSpPr>
+          <a:xfrm>
+            <a:off x="873025" y="2904216"/>
+            <a:ext cx="4800600" cy="1261872"/>
+            <a:chOff x="6537960" y="1298448"/>
+            <a:chExt cx="4800600" cy="1261872"/>
+          </a:xfrm>
+        </p:grpSpPr>
+        <p:sp>
+          <p:nvSpPr>
+            <p:cNvPr id="12" name="Text 10"/>
+            <p:cNvSpPr/>
+            <p:nvPr/>
+          </p:nvSpPr>
+          <p:spPr>
+            <a:xfrm>
+              <a:off x="6537960" y="1298448"/>
+              <a:ext cx="2743200" cy="228600"/>
+            </a:xfrm>
+            <a:prstGeom prst="rect">
+              <a:avLst/>
+            </a:prstGeom>
+            <a:noFill/>
+            <a:ln/>
+          </p:spPr>
+          <p:txBody>
+            <a:bodyPr wrap="square" lIns="0" tIns="0" rIns="0" bIns="0" rtlCol="0" anchor="ctr"/>
+            <a:lstStyle/>
+            <a:p>
+              <a:pPr marL="0" indent="0">
+                <a:buNone/>
+              </a:pPr>
+              <a:r>
+                <a:rPr lang="en-US" sz="1700" b="1" dirty="0">
+                  <a:solidFill>
+                    <a:srgbClr val="1F77B4"/>
+                  </a:solidFill>
+                </a:rPr>
+                <a:t>Main exposure</a:t>
+              </a:r>
+              <a:endParaRPr lang="en-US" sz="1700" dirty="0"/>
+            </a:p>
+          </p:txBody>
+        </p:sp>
+        <p:sp>
+          <p:nvSpPr>
+            <p:cNvPr id="13" name="Text 11"/>
+            <p:cNvSpPr/>
+            <p:nvPr/>
+          </p:nvSpPr>
+          <p:spPr>
+            <a:xfrm>
+              <a:off x="6537960" y="1719072"/>
+              <a:ext cx="4800600" cy="841248"/>
+            </a:xfrm>
+            <a:prstGeom prst="rect">
+              <a:avLst/>
+            </a:prstGeom>
+            <a:noFill/>
+            <a:ln/>
+          </p:spPr>
+          <p:txBody>
+            <a:bodyPr wrap="square" lIns="254" tIns="254" rIns="254" bIns="254" rtlCol="0" anchor="ctr">
+              <a:normAutofit lnSpcReduction="10000"/>
+            </a:bodyPr>
+            <a:lstStyle/>
+            <a:p>
+              <a:pPr marL="0" indent="0">
+                <a:buNone/>
+              </a:pPr>
+              <a:r>
+                <a:rPr lang="en-US" sz="2000" b="1" dirty="0">
+                  <a:solidFill>
+                    <a:srgbClr val="0F2F25"/>
+                  </a:solidFill>
+                </a:rPr>
+                <a:t>Province-level annual mean NDVI from NASA Harmonized Landsat–Sentinel vegetation products.</a:t>
+              </a:r>
+              <a:endParaRPr lang="en-US" sz="2000" dirty="0"/>
+            </a:p>
+          </p:txBody>
+        </p:sp>
+      </p:grpSp>
       <p:sp>
         <p:nvSpPr>
           <p:cNvPr id="14" name="Shape 12"/>
@@ -2165,8 +2120,8 @@
         </p:nvSpPr>
         <p:spPr>
           <a:xfrm>
-            <a:off x="5943600" y="1417320"/>
-            <a:ext cx="0" cy="3749040"/>
+            <a:off x="5920966" y="2843784"/>
+            <a:ext cx="0" cy="1773483"/>
           </a:xfrm>
           <a:prstGeom prst="line">
             <a:avLst/>
@@ -2180,143 +2135,205 @@
           </a:ln>
         </p:spPr>
       </p:sp>
-      <p:sp>
-        <p:nvSpPr>
-          <p:cNvPr id="15" name="Text 13"/>
-          <p:cNvSpPr/>
-          <p:nvPr/>
-        </p:nvSpPr>
-        <p:spPr>
-          <a:xfrm>
-            <a:off x="777239" y="3950208"/>
-            <a:ext cx="2926080" cy="228600"/>
-          </a:xfrm>
-          <a:prstGeom prst="rect">
-            <a:avLst/>
-          </a:prstGeom>
-          <a:noFill/>
-          <a:ln/>
-        </p:spPr>
-        <p:txBody>
-          <a:bodyPr wrap="square" lIns="0" tIns="0" rIns="0" bIns="0" rtlCol="0" anchor="ctr"/>
-          <a:lstStyle/>
-          <a:p>
-            <a:pPr marL="0" indent="0">
-              <a:buNone/>
-            </a:pPr>
-            <a:r>
-              <a:rPr lang="en-US" sz="1700" b="1" dirty="0">
-                <a:solidFill>
-                  <a:srgbClr val="0B5D3B"/>
-                </a:solidFill>
-              </a:rPr>
-              <a:t>Expected patterns</a:t>
-            </a:r>
-            <a:endParaRPr lang="en-US" sz="1700" dirty="0"/>
-          </a:p>
-        </p:txBody>
-      </p:sp>
-      <p:sp>
-        <p:nvSpPr>
-          <p:cNvPr id="16" name="Shape 14"/>
-          <p:cNvSpPr/>
-          <p:nvPr/>
-        </p:nvSpPr>
-        <p:spPr>
-          <a:xfrm>
-            <a:off x="777239" y="4407408"/>
-            <a:ext cx="91440" cy="91440"/>
-          </a:xfrm>
-          <a:prstGeom prst="ellipse">
-            <a:avLst/>
-          </a:prstGeom>
-          <a:solidFill>
-            <a:srgbClr val="1F77B4"/>
-          </a:solidFill>
-          <a:ln w="12700">
+      <p:grpSp>
+        <p:nvGrpSpPr>
+          <p:cNvPr id="23" name="组合 22">
+            <a:extLst>
+              <a:ext uri="{FF2B5EF4-FFF2-40B4-BE49-F238E27FC236}">
+                <a16:creationId xmlns:a16="http://schemas.microsoft.com/office/drawing/2014/main" id="{EC5CF192-05F5-76CB-64D4-A9ED470B1F5D}"/>
+              </a:ext>
+            </a:extLst>
+          </p:cNvPr>
+          <p:cNvGrpSpPr/>
+          <p:nvPr/>
+        </p:nvGrpSpPr>
+        <p:grpSpPr>
+          <a:xfrm>
+            <a:off x="990945" y="4714682"/>
+            <a:ext cx="8293835" cy="1316736"/>
+            <a:chOff x="6519672" y="5020056"/>
+            <a:chExt cx="4956048" cy="1316736"/>
+          </a:xfrm>
+        </p:grpSpPr>
+        <p:sp>
+          <p:nvSpPr>
+            <p:cNvPr id="15" name="Text 13"/>
+            <p:cNvSpPr/>
+            <p:nvPr/>
+          </p:nvSpPr>
+          <p:spPr>
+            <a:xfrm>
+              <a:off x="6519672" y="5020056"/>
+              <a:ext cx="2926080" cy="228600"/>
+            </a:xfrm>
+            <a:prstGeom prst="rect">
+              <a:avLst/>
+            </a:prstGeom>
+            <a:noFill/>
+            <a:ln/>
+          </p:spPr>
+          <p:txBody>
+            <a:bodyPr wrap="square" lIns="0" tIns="0" rIns="0" bIns="0" rtlCol="0" anchor="ctr"/>
+            <a:lstStyle/>
+            <a:p>
+              <a:pPr marL="0" indent="0">
+                <a:buNone/>
+              </a:pPr>
+              <a:r>
+                <a:rPr lang="en-US" b="1" dirty="0">
+                  <a:solidFill>
+                    <a:srgbClr val="0B5D3B"/>
+                  </a:solidFill>
+                </a:rPr>
+                <a:t>Expected patterns</a:t>
+              </a:r>
+              <a:endParaRPr lang="en-US" dirty="0"/>
+            </a:p>
+          </p:txBody>
+        </p:sp>
+        <p:sp>
+          <p:nvSpPr>
+            <p:cNvPr id="16" name="Shape 14"/>
+            <p:cNvSpPr/>
+            <p:nvPr/>
+          </p:nvSpPr>
+          <p:spPr>
+            <a:xfrm>
+              <a:off x="6519672" y="5477256"/>
+              <a:ext cx="51639" cy="91440"/>
+            </a:xfrm>
+            <a:prstGeom prst="ellipse">
+              <a:avLst/>
+            </a:prstGeom>
             <a:solidFill>
               <a:srgbClr val="1F77B4"/>
             </a:solidFill>
-            <a:prstDash val="solid"/>
-          </a:ln>
-        </p:spPr>
-      </p:sp>
-      <p:sp>
-        <p:nvSpPr>
-          <p:cNvPr id="17" name="Text 15"/>
-          <p:cNvSpPr/>
-          <p:nvPr/>
-        </p:nvSpPr>
-        <p:spPr>
-          <a:xfrm>
-            <a:off x="978407" y="4334256"/>
-            <a:ext cx="4754880" cy="384048"/>
-          </a:xfrm>
-          <a:prstGeom prst="rect">
-            <a:avLst/>
-          </a:prstGeom>
-          <a:noFill/>
-          <a:ln/>
-        </p:spPr>
-        <p:txBody>
-          <a:bodyPr wrap="square" lIns="254" tIns="254" rIns="254" bIns="254" rtlCol="0" anchor="ctr">
-            <a:normAutofit fontScale="85000" lnSpcReduction="20000"/>
-          </a:bodyPr>
-          <a:lstStyle/>
-          <a:p>
-            <a:pPr marL="0" indent="0">
-              <a:buNone/>
-            </a:pPr>
-            <a:r>
-              <a:rPr lang="en-US" sz="1700" dirty="0">
-                <a:solidFill>
-                  <a:srgbClr val="0F2F25"/>
-                </a:solidFill>
-                <a:latin typeface="Aptos" pitchFamily="34" charset="0"/>
-                <a:ea typeface="Aptos" pitchFamily="34" charset="-122"/>
-                <a:cs typeface="Aptos" pitchFamily="34" charset="-120"/>
-              </a:rPr>
-              <a:t>Greenness may raise happiness through amenities and quality of life.</a:t>
-            </a:r>
-            <a:endParaRPr lang="en-US" sz="1700" dirty="0"/>
-          </a:p>
-        </p:txBody>
-      </p:sp>
-      <p:sp>
-        <p:nvSpPr>
-          <p:cNvPr id="18" name="Shape 16"/>
-          <p:cNvSpPr/>
-          <p:nvPr/>
-        </p:nvSpPr>
-        <p:spPr>
-          <a:xfrm>
-            <a:off x="777239" y="4956048"/>
-            <a:ext cx="91440" cy="91440"/>
-          </a:xfrm>
-          <a:prstGeom prst="ellipse">
-            <a:avLst/>
-          </a:prstGeom>
-          <a:solidFill>
-            <a:srgbClr val="1F77B4"/>
-          </a:solidFill>
-          <a:ln w="12700">
+            <a:ln w="12700">
+              <a:solidFill>
+                <a:srgbClr val="1F77B4"/>
+              </a:solidFill>
+              <a:prstDash val="solid"/>
+            </a:ln>
+          </p:spPr>
+        </p:sp>
+        <p:sp>
+          <p:nvSpPr>
+            <p:cNvPr id="17" name="Text 15"/>
+            <p:cNvSpPr/>
+            <p:nvPr/>
+          </p:nvSpPr>
+          <p:spPr>
+            <a:xfrm>
+              <a:off x="6720840" y="5404104"/>
+              <a:ext cx="4754880" cy="384048"/>
+            </a:xfrm>
+            <a:prstGeom prst="rect">
+              <a:avLst/>
+            </a:prstGeom>
+            <a:noFill/>
+            <a:ln/>
+          </p:spPr>
+          <p:txBody>
+            <a:bodyPr wrap="square" lIns="254" tIns="254" rIns="254" bIns="254" rtlCol="0" anchor="ctr">
+              <a:noAutofit/>
+            </a:bodyPr>
+            <a:lstStyle/>
+            <a:p>
+              <a:pPr marL="0" indent="0">
+                <a:buNone/>
+              </a:pPr>
+              <a:r>
+                <a:rPr lang="en-US" sz="1600" dirty="0">
+                  <a:solidFill>
+                    <a:srgbClr val="0F2F25"/>
+                  </a:solidFill>
+                  <a:latin typeface="Aptos" pitchFamily="34" charset="0"/>
+                  <a:ea typeface="Aptos" pitchFamily="34" charset="-122"/>
+                  <a:cs typeface="Aptos" pitchFamily="34" charset="-120"/>
+                </a:rPr>
+                <a:t>Greenness may raise happiness through amenities and quality of life.</a:t>
+              </a:r>
+              <a:endParaRPr lang="en-US" sz="1600" dirty="0"/>
+            </a:p>
+          </p:txBody>
+        </p:sp>
+        <p:sp>
+          <p:nvSpPr>
+            <p:cNvPr id="18" name="Shape 16"/>
+            <p:cNvSpPr/>
+            <p:nvPr/>
+          </p:nvSpPr>
+          <p:spPr>
+            <a:xfrm>
+              <a:off x="6519672" y="6025896"/>
+              <a:ext cx="51639" cy="91440"/>
+            </a:xfrm>
+            <a:prstGeom prst="ellipse">
+              <a:avLst/>
+            </a:prstGeom>
             <a:solidFill>
               <a:srgbClr val="1F77B4"/>
             </a:solidFill>
-            <a:prstDash val="solid"/>
-          </a:ln>
-        </p:spPr>
-      </p:sp>
-      <p:sp>
-        <p:nvSpPr>
-          <p:cNvPr id="19" name="Text 17"/>
-          <p:cNvSpPr/>
-          <p:nvPr/>
-        </p:nvSpPr>
-        <p:spPr>
-          <a:xfrm>
-            <a:off x="978407" y="4882896"/>
-            <a:ext cx="4754880" cy="384048"/>
+            <a:ln w="12700">
+              <a:solidFill>
+                <a:srgbClr val="1F77B4"/>
+              </a:solidFill>
+              <a:prstDash val="solid"/>
+            </a:ln>
+          </p:spPr>
+        </p:sp>
+        <p:sp>
+          <p:nvSpPr>
+            <p:cNvPr id="19" name="Text 17"/>
+            <p:cNvSpPr/>
+            <p:nvPr/>
+          </p:nvSpPr>
+          <p:spPr>
+            <a:xfrm>
+              <a:off x="6720840" y="5952744"/>
+              <a:ext cx="4754880" cy="384048"/>
+            </a:xfrm>
+            <a:prstGeom prst="rect">
+              <a:avLst/>
+            </a:prstGeom>
+            <a:noFill/>
+            <a:ln/>
+          </p:spPr>
+          <p:txBody>
+            <a:bodyPr wrap="square" lIns="254" tIns="254" rIns="254" bIns="254" rtlCol="0" anchor="ctr">
+              <a:noAutofit/>
+            </a:bodyPr>
+            <a:lstStyle/>
+            <a:p>
+              <a:pPr marL="0" indent="0">
+                <a:buNone/>
+              </a:pPr>
+              <a:r>
+                <a:rPr lang="en-US" sz="1600" dirty="0">
+                  <a:solidFill>
+                    <a:srgbClr val="0F2F25"/>
+                  </a:solidFill>
+                  <a:latin typeface="Aptos" pitchFamily="34" charset="0"/>
+                  <a:ea typeface="Aptos" pitchFamily="34" charset="-122"/>
+                  <a:cs typeface="Aptos" pitchFamily="34" charset="-120"/>
+                </a:rPr>
+                <a:t>Greener places may show lower WTP if residents perceive less need for additional improvement.</a:t>
+              </a:r>
+              <a:endParaRPr lang="en-US" sz="1600" dirty="0"/>
+            </a:p>
+          </p:txBody>
+        </p:sp>
+      </p:grpSp>
+      <p:sp>
+        <p:nvSpPr>
+          <p:cNvPr id="20" name="Text 18"/>
+          <p:cNvSpPr/>
+          <p:nvPr/>
+        </p:nvSpPr>
+        <p:spPr>
+          <a:xfrm>
+            <a:off x="690919" y="1078992"/>
+            <a:ext cx="10972799" cy="1636776"/>
           </a:xfrm>
           <a:prstGeom prst="rect">
             <a:avLst/>
@@ -2325,62 +2342,32 @@
           <a:ln/>
         </p:spPr>
         <p:txBody>
-          <a:bodyPr wrap="square" lIns="254" tIns="254" rIns="254" bIns="254" rtlCol="0" anchor="ctr">
-            <a:normAutofit fontScale="85000" lnSpcReduction="20000"/>
-          </a:bodyPr>
-          <a:lstStyle/>
-          <a:p>
-            <a:pPr marL="0" indent="0">
-              <a:buNone/>
+          <a:bodyPr wrap="square" lIns="0" tIns="0" rIns="0" bIns="0" rtlCol="0" anchor="ctr"/>
+          <a:lstStyle/>
+          <a:p>
+            <a:pPr marL="342900" indent="-342900">
+              <a:lnSpc>
+                <a:spcPct val="150000"/>
+              </a:lnSpc>
+              <a:buAutoNum type="arabicPeriod"/>
             </a:pPr>
             <a:r>
-              <a:rPr lang="en-US" sz="1700" dirty="0">
-                <a:solidFill>
-                  <a:srgbClr val="0F2F25"/>
-                </a:solidFill>
-                <a:latin typeface="Aptos" pitchFamily="34" charset="0"/>
-                <a:ea typeface="Aptos" pitchFamily="34" charset="-122"/>
-                <a:cs typeface="Aptos" pitchFamily="34" charset="-120"/>
-              </a:rPr>
-              <a:t>Greener places may show lower WTP if residents perceive less need for additional improvement.</a:t>
-            </a:r>
-            <a:endParaRPr lang="en-US" sz="1700" dirty="0"/>
-          </a:p>
-        </p:txBody>
-      </p:sp>
-      <p:sp>
-        <p:nvSpPr>
-          <p:cNvPr id="20" name="Text 18"/>
-          <p:cNvSpPr/>
-          <p:nvPr/>
-        </p:nvSpPr>
-        <p:spPr>
-          <a:xfrm>
-            <a:off x="685800" y="5852160"/>
-            <a:ext cx="10789920" cy="365760"/>
-          </a:xfrm>
-          <a:prstGeom prst="rect">
-            <a:avLst/>
-          </a:prstGeom>
-          <a:noFill/>
-          <a:ln/>
-        </p:spPr>
-        <p:txBody>
-          <a:bodyPr wrap="square" lIns="0" tIns="0" rIns="0" bIns="0" rtlCol="0" anchor="ctr"/>
-          <a:lstStyle/>
-          <a:p>
-            <a:r>
-              <a:rPr lang="en-US" altLang="zh-CN" b="1" dirty="0"/>
-              <a:t>1. How does local greenness measure influence self-reported happiness in China?</a:t>
-            </a:r>
-            <a:endParaRPr lang="en-US" altLang="zh-CN" dirty="0"/>
-          </a:p>
-          <a:p>
-            <a:r>
-              <a:rPr lang="en-US" altLang="zh-CN" b="1" dirty="0"/>
-              <a:t>2. What is the relationship between local greenness and people’s willingness to pay for environmental efforts?</a:t>
-            </a:r>
-            <a:endParaRPr lang="en-US" altLang="zh-CN" dirty="0"/>
+              <a:rPr lang="en-US" altLang="zh-CN" sz="2000" b="1" dirty="0"/>
+              <a:t>How does local greenness measure influence self-reported happiness in China?</a:t>
+            </a:r>
+          </a:p>
+          <a:p>
+            <a:pPr marL="342900" indent="-342900">
+              <a:lnSpc>
+                <a:spcPct val="150000"/>
+              </a:lnSpc>
+              <a:buAutoNum type="arabicPeriod"/>
+            </a:pPr>
+            <a:r>
+              <a:rPr lang="en-US" altLang="zh-CN" sz="2000" b="1" dirty="0"/>
+              <a:t>What is the relationship between local greenness and people’s willingness to pay for environmental efforts?</a:t>
+            </a:r>
+            <a:endParaRPr lang="en-US" altLang="zh-CN" sz="2000" dirty="0"/>
           </a:p>
         </p:txBody>
       </p:sp>
@@ -2528,7 +2515,7 @@
         </p:nvSpPr>
         <p:spPr>
           <a:xfrm>
-            <a:off x="502920" y="438912"/>
+            <a:off x="502920" y="484315"/>
             <a:ext cx="10972800" cy="502920"/>
           </a:xfrm>
           <a:prstGeom prst="rect">
@@ -2567,8 +2554,8 @@
         </p:nvSpPr>
         <p:spPr>
           <a:xfrm>
-            <a:off x="658368" y="1298448"/>
-            <a:ext cx="5669280" cy="411480"/>
+            <a:off x="658368" y="1417320"/>
+            <a:ext cx="4883257" cy="411480"/>
           </a:xfrm>
           <a:prstGeom prst="rect">
             <a:avLst/>
@@ -2603,8 +2590,8 @@
         </p:nvSpPr>
         <p:spPr>
           <a:xfrm>
-            <a:off x="685800" y="2066544"/>
-            <a:ext cx="91440" cy="91440"/>
+            <a:off x="685800" y="2185416"/>
+            <a:ext cx="78762" cy="91440"/>
           </a:xfrm>
           <a:prstGeom prst="ellipse">
             <a:avLst/>
@@ -2628,8 +2615,8 @@
         </p:nvSpPr>
         <p:spPr>
           <a:xfrm>
-            <a:off x="886968" y="1993392"/>
-            <a:ext cx="5212080" cy="384048"/>
+            <a:off x="886968" y="2112264"/>
+            <a:ext cx="4489446" cy="384048"/>
           </a:xfrm>
           <a:prstGeom prst="rect">
             <a:avLst/>
@@ -2639,7 +2626,7 @@
         </p:spPr>
         <p:txBody>
           <a:bodyPr wrap="square" lIns="254" tIns="254" rIns="254" bIns="254" rtlCol="0" anchor="ctr">
-            <a:normAutofit/>
+            <a:normAutofit fontScale="85000" lnSpcReduction="10000"/>
           </a:bodyPr>
           <a:lstStyle/>
           <a:p>
@@ -2669,8 +2656,8 @@
         </p:nvSpPr>
         <p:spPr>
           <a:xfrm>
-            <a:off x="685800" y="2615184"/>
-            <a:ext cx="91440" cy="91440"/>
+            <a:off x="685800" y="2734056"/>
+            <a:ext cx="78762" cy="91440"/>
           </a:xfrm>
           <a:prstGeom prst="ellipse">
             <a:avLst/>
@@ -2694,8 +2681,8 @@
         </p:nvSpPr>
         <p:spPr>
           <a:xfrm>
-            <a:off x="886968" y="2542032"/>
-            <a:ext cx="5623560" cy="384048"/>
+            <a:off x="886968" y="2660904"/>
+            <a:ext cx="4843876" cy="384048"/>
           </a:xfrm>
           <a:prstGeom prst="rect">
             <a:avLst/>
@@ -2735,8 +2722,8 @@
         </p:nvSpPr>
         <p:spPr>
           <a:xfrm>
-            <a:off x="685800" y="3163824"/>
-            <a:ext cx="91440" cy="91440"/>
+            <a:off x="685800" y="3282696"/>
+            <a:ext cx="78762" cy="91440"/>
           </a:xfrm>
           <a:prstGeom prst="ellipse">
             <a:avLst/>
@@ -2760,8 +2747,8 @@
         </p:nvSpPr>
         <p:spPr>
           <a:xfrm>
-            <a:off x="886968" y="3090672"/>
-            <a:ext cx="5623560" cy="384048"/>
+            <a:off x="886968" y="3209544"/>
+            <a:ext cx="4843876" cy="384048"/>
           </a:xfrm>
           <a:prstGeom prst="rect">
             <a:avLst/>
@@ -2771,7 +2758,7 @@
         </p:spPr>
         <p:txBody>
           <a:bodyPr wrap="square" lIns="254" tIns="254" rIns="254" bIns="254" rtlCol="0" anchor="ctr">
-            <a:normAutofit fontScale="85000" lnSpcReduction="10000"/>
+            <a:normAutofit fontScale="85000" lnSpcReduction="20000"/>
           </a:bodyPr>
           <a:lstStyle/>
           <a:p>
@@ -2801,8 +2788,8 @@
         </p:nvSpPr>
         <p:spPr>
           <a:xfrm>
-            <a:off x="685800" y="3712464"/>
-            <a:ext cx="91440" cy="91440"/>
+            <a:off x="685800" y="3831336"/>
+            <a:ext cx="78762" cy="91440"/>
           </a:xfrm>
           <a:prstGeom prst="ellipse">
             <a:avLst/>
@@ -2826,8 +2813,8 @@
         </p:nvSpPr>
         <p:spPr>
           <a:xfrm>
-            <a:off x="886968" y="3639312"/>
-            <a:ext cx="5623560" cy="384048"/>
+            <a:off x="886968" y="3758184"/>
+            <a:ext cx="4843876" cy="384048"/>
           </a:xfrm>
           <a:prstGeom prst="rect">
             <a:avLst/>
@@ -2837,7 +2824,7 @@
         </p:spPr>
         <p:txBody>
           <a:bodyPr wrap="square" lIns="254" tIns="254" rIns="254" bIns="254" rtlCol="0" anchor="ctr">
-            <a:normAutofit fontScale="85000" lnSpcReduction="10000"/>
+            <a:normAutofit fontScale="85000" lnSpcReduction="20000"/>
           </a:bodyPr>
           <a:lstStyle/>
           <a:p>
@@ -2859,225 +2846,210 @@
           </a:p>
         </p:txBody>
       </p:sp>
-      <p:sp>
-        <p:nvSpPr>
-          <p:cNvPr id="14" name="Text 12"/>
-          <p:cNvSpPr/>
-          <p:nvPr/>
-        </p:nvSpPr>
-        <p:spPr>
-          <a:xfrm>
-            <a:off x="6766560" y="1280160"/>
-            <a:ext cx="3840480" cy="256032"/>
-          </a:xfrm>
-          <a:prstGeom prst="rect">
-            <a:avLst/>
-          </a:prstGeom>
-          <a:noFill/>
-          <a:ln/>
-        </p:spPr>
-        <p:txBody>
-          <a:bodyPr wrap="square" lIns="0" tIns="0" rIns="0" bIns="0" rtlCol="0" anchor="ctr"/>
-          <a:lstStyle/>
-          <a:p>
-            <a:pPr marL="0" indent="0">
-              <a:buNone/>
-            </a:pPr>
-            <a:r>
-              <a:rPr lang="en-US" sz="1700" b="1" dirty="0">
-                <a:solidFill>
-                  <a:srgbClr val="0B5D3B"/>
-                </a:solidFill>
-              </a:rPr>
-              <a:t>Scalable unit of work</a:t>
-            </a:r>
-            <a:endParaRPr lang="en-US" sz="1700" dirty="0"/>
-          </a:p>
-        </p:txBody>
-      </p:sp>
-      <p:sp>
-        <p:nvSpPr>
-          <p:cNvPr id="15" name="Shape 13"/>
-          <p:cNvSpPr/>
-          <p:nvPr/>
-        </p:nvSpPr>
-        <p:spPr>
-          <a:xfrm>
-            <a:off x="6903720" y="1828800"/>
-            <a:ext cx="1737360" cy="457200"/>
-          </a:xfrm>
-          <a:prstGeom prst="rect">
-            <a:avLst/>
-          </a:prstGeom>
-          <a:solidFill>
-            <a:srgbClr val="E6F0FA"/>
-          </a:solidFill>
-          <a:ln w="12700">
+      <p:grpSp>
+        <p:nvGrpSpPr>
+          <p:cNvPr id="34" name="组合 33">
+            <a:extLst>
+              <a:ext uri="{FF2B5EF4-FFF2-40B4-BE49-F238E27FC236}">
+                <a16:creationId xmlns:a16="http://schemas.microsoft.com/office/drawing/2014/main" id="{DDA979D2-6483-0246-B79D-0A594DDAC64A}"/>
+              </a:ext>
+            </a:extLst>
+          </p:cNvPr>
+          <p:cNvGrpSpPr/>
+          <p:nvPr/>
+        </p:nvGrpSpPr>
+        <p:grpSpPr>
+          <a:xfrm>
+            <a:off x="10367097" y="1792224"/>
+            <a:ext cx="1199131" cy="1737360"/>
+            <a:chOff x="6903720" y="1828800"/>
+            <a:chExt cx="1737360" cy="1737360"/>
+          </a:xfrm>
+        </p:grpSpPr>
+        <p:sp>
+          <p:nvSpPr>
+            <p:cNvPr id="15" name="Shape 13"/>
+            <p:cNvSpPr/>
+            <p:nvPr/>
+          </p:nvSpPr>
+          <p:spPr>
+            <a:xfrm>
+              <a:off x="6903720" y="1828800"/>
+              <a:ext cx="1737360" cy="457200"/>
+            </a:xfrm>
+            <a:prstGeom prst="rect">
+              <a:avLst/>
+            </a:prstGeom>
             <a:solidFill>
-              <a:srgbClr val="1F77B4"/>
+              <a:srgbClr val="E6F0FA"/>
             </a:solidFill>
-            <a:prstDash val="solid"/>
-          </a:ln>
-        </p:spPr>
-      </p:sp>
-      <p:sp>
-        <p:nvSpPr>
-          <p:cNvPr id="16" name="Text 14"/>
-          <p:cNvSpPr/>
-          <p:nvPr/>
-        </p:nvSpPr>
-        <p:spPr>
-          <a:xfrm>
-            <a:off x="6995160" y="1965960"/>
-            <a:ext cx="1554480" cy="146304"/>
-          </a:xfrm>
-          <a:prstGeom prst="rect">
-            <a:avLst/>
-          </a:prstGeom>
-          <a:noFill/>
-          <a:ln/>
-        </p:spPr>
-        <p:txBody>
-          <a:bodyPr wrap="square" lIns="0" tIns="0" rIns="0" bIns="0" rtlCol="0" anchor="ctr"/>
-          <a:lstStyle/>
-          <a:p>
-            <a:pPr marL="0" indent="0" algn="ctr">
-              <a:buNone/>
-            </a:pPr>
-            <a:r>
-              <a:rPr lang="en-US" sz="1300" b="1" dirty="0">
-                <a:solidFill>
-                  <a:srgbClr val="1F77B4"/>
-                </a:solidFill>
-              </a:rPr>
-              <a:t>province = task</a:t>
-            </a:r>
-            <a:endParaRPr lang="en-US" sz="1300" dirty="0"/>
-          </a:p>
-        </p:txBody>
-      </p:sp>
-      <p:sp>
-        <p:nvSpPr>
-          <p:cNvPr id="17" name="Shape 15"/>
-          <p:cNvSpPr/>
-          <p:nvPr/>
-        </p:nvSpPr>
-        <p:spPr>
-          <a:xfrm>
-            <a:off x="6903720" y="2468880"/>
-            <a:ext cx="1737360" cy="457200"/>
-          </a:xfrm>
-          <a:prstGeom prst="rect">
-            <a:avLst/>
-          </a:prstGeom>
-          <a:solidFill>
-            <a:srgbClr val="E6F0FA"/>
-          </a:solidFill>
-          <a:ln w="12700">
+            <a:ln w="12700">
+              <a:solidFill>
+                <a:srgbClr val="1F77B4"/>
+              </a:solidFill>
+              <a:prstDash val="solid"/>
+            </a:ln>
+          </p:spPr>
+        </p:sp>
+        <p:sp>
+          <p:nvSpPr>
+            <p:cNvPr id="16" name="Text 14"/>
+            <p:cNvSpPr/>
+            <p:nvPr/>
+          </p:nvSpPr>
+          <p:spPr>
+            <a:xfrm>
+              <a:off x="6995160" y="1965960"/>
+              <a:ext cx="1554480" cy="146304"/>
+            </a:xfrm>
+            <a:prstGeom prst="rect">
+              <a:avLst/>
+            </a:prstGeom>
+            <a:noFill/>
+            <a:ln/>
+          </p:spPr>
+          <p:txBody>
+            <a:bodyPr wrap="square" lIns="0" tIns="0" rIns="0" bIns="0" rtlCol="0" anchor="ctr"/>
+            <a:lstStyle/>
+            <a:p>
+              <a:pPr marL="0" indent="0" algn="ctr">
+                <a:buNone/>
+              </a:pPr>
+              <a:r>
+                <a:rPr lang="en-US" sz="1300" b="1" dirty="0">
+                  <a:solidFill>
+                    <a:srgbClr val="1F77B4"/>
+                  </a:solidFill>
+                </a:rPr>
+                <a:t>worker</a:t>
+              </a:r>
+              <a:endParaRPr lang="en-US" sz="1300" dirty="0"/>
+            </a:p>
+          </p:txBody>
+        </p:sp>
+        <p:sp>
+          <p:nvSpPr>
+            <p:cNvPr id="17" name="Shape 15"/>
+            <p:cNvSpPr/>
+            <p:nvPr/>
+          </p:nvSpPr>
+          <p:spPr>
+            <a:xfrm>
+              <a:off x="6903720" y="2468880"/>
+              <a:ext cx="1737360" cy="457200"/>
+            </a:xfrm>
+            <a:prstGeom prst="rect">
+              <a:avLst/>
+            </a:prstGeom>
             <a:solidFill>
-              <a:srgbClr val="1F77B4"/>
+              <a:srgbClr val="E6F0FA"/>
             </a:solidFill>
-            <a:prstDash val="solid"/>
-          </a:ln>
-        </p:spPr>
-      </p:sp>
-      <p:sp>
-        <p:nvSpPr>
-          <p:cNvPr id="18" name="Text 16"/>
-          <p:cNvSpPr/>
-          <p:nvPr/>
-        </p:nvSpPr>
-        <p:spPr>
-          <a:xfrm>
-            <a:off x="6995160" y="2606040"/>
-            <a:ext cx="1554480" cy="146304"/>
-          </a:xfrm>
-          <a:prstGeom prst="rect">
-            <a:avLst/>
-          </a:prstGeom>
-          <a:noFill/>
-          <a:ln/>
-        </p:spPr>
-        <p:txBody>
-          <a:bodyPr wrap="square" lIns="0" tIns="0" rIns="0" bIns="0" rtlCol="0" anchor="ctr"/>
-          <a:lstStyle/>
-          <a:p>
-            <a:pPr marL="0" indent="0" algn="ctr">
-              <a:buNone/>
-            </a:pPr>
-            <a:r>
-              <a:rPr lang="en-US" sz="1300" b="1" dirty="0">
-                <a:solidFill>
-                  <a:srgbClr val="1F77B4"/>
-                </a:solidFill>
-              </a:rPr>
-              <a:t>province = task</a:t>
-            </a:r>
-            <a:endParaRPr lang="en-US" sz="1300" dirty="0"/>
-          </a:p>
-        </p:txBody>
-      </p:sp>
-      <p:sp>
-        <p:nvSpPr>
-          <p:cNvPr id="19" name="Shape 17"/>
-          <p:cNvSpPr/>
-          <p:nvPr/>
-        </p:nvSpPr>
-        <p:spPr>
-          <a:xfrm>
-            <a:off x="6903720" y="3108960"/>
-            <a:ext cx="1737360" cy="457200"/>
-          </a:xfrm>
-          <a:prstGeom prst="rect">
-            <a:avLst/>
-          </a:prstGeom>
-          <a:solidFill>
-            <a:srgbClr val="E6F0FA"/>
-          </a:solidFill>
-          <a:ln w="12700">
+            <a:ln w="12700">
+              <a:solidFill>
+                <a:srgbClr val="1F77B4"/>
+              </a:solidFill>
+              <a:prstDash val="solid"/>
+            </a:ln>
+          </p:spPr>
+        </p:sp>
+        <p:sp>
+          <p:nvSpPr>
+            <p:cNvPr id="18" name="Text 16"/>
+            <p:cNvSpPr/>
+            <p:nvPr/>
+          </p:nvSpPr>
+          <p:spPr>
+            <a:xfrm>
+              <a:off x="6995160" y="2606040"/>
+              <a:ext cx="1554480" cy="146304"/>
+            </a:xfrm>
+            <a:prstGeom prst="rect">
+              <a:avLst/>
+            </a:prstGeom>
+            <a:noFill/>
+            <a:ln/>
+          </p:spPr>
+          <p:txBody>
+            <a:bodyPr wrap="square" lIns="0" tIns="0" rIns="0" bIns="0" rtlCol="0" anchor="ctr"/>
+            <a:lstStyle/>
+            <a:p>
+              <a:pPr marL="0" indent="0" algn="ctr">
+                <a:buNone/>
+              </a:pPr>
+              <a:r>
+                <a:rPr lang="en-US" sz="1300" b="1" dirty="0">
+                  <a:solidFill>
+                    <a:srgbClr val="1F77B4"/>
+                  </a:solidFill>
+                </a:rPr>
+                <a:t>worker</a:t>
+              </a:r>
+              <a:endParaRPr lang="en-US" sz="1300" dirty="0"/>
+            </a:p>
+          </p:txBody>
+        </p:sp>
+        <p:sp>
+          <p:nvSpPr>
+            <p:cNvPr id="19" name="Shape 17"/>
+            <p:cNvSpPr/>
+            <p:nvPr/>
+          </p:nvSpPr>
+          <p:spPr>
+            <a:xfrm>
+              <a:off x="6903720" y="3108960"/>
+              <a:ext cx="1737360" cy="457200"/>
+            </a:xfrm>
+            <a:prstGeom prst="rect">
+              <a:avLst/>
+            </a:prstGeom>
             <a:solidFill>
-              <a:srgbClr val="1F77B4"/>
+              <a:srgbClr val="E6F0FA"/>
             </a:solidFill>
-            <a:prstDash val="solid"/>
-          </a:ln>
-        </p:spPr>
-      </p:sp>
-      <p:sp>
-        <p:nvSpPr>
-          <p:cNvPr id="20" name="Text 18"/>
-          <p:cNvSpPr/>
-          <p:nvPr/>
-        </p:nvSpPr>
-        <p:spPr>
-          <a:xfrm>
-            <a:off x="6995160" y="3246120"/>
-            <a:ext cx="1554480" cy="146304"/>
-          </a:xfrm>
-          <a:prstGeom prst="rect">
-            <a:avLst/>
-          </a:prstGeom>
-          <a:noFill/>
-          <a:ln/>
-        </p:spPr>
-        <p:txBody>
-          <a:bodyPr wrap="square" lIns="0" tIns="0" rIns="0" bIns="0" rtlCol="0" anchor="ctr"/>
-          <a:lstStyle/>
-          <a:p>
-            <a:pPr marL="0" indent="0" algn="ctr">
-              <a:buNone/>
-            </a:pPr>
-            <a:r>
-              <a:rPr lang="en-US" sz="1300" b="1" dirty="0">
-                <a:solidFill>
-                  <a:srgbClr val="1F77B4"/>
-                </a:solidFill>
-              </a:rPr>
-              <a:t>province = task</a:t>
-            </a:r>
-            <a:endParaRPr lang="en-US" sz="1300" dirty="0"/>
-          </a:p>
-        </p:txBody>
-      </p:sp>
+            <a:ln w="12700">
+              <a:solidFill>
+                <a:srgbClr val="1F77B4"/>
+              </a:solidFill>
+              <a:prstDash val="solid"/>
+            </a:ln>
+          </p:spPr>
+        </p:sp>
+        <p:sp>
+          <p:nvSpPr>
+            <p:cNvPr id="20" name="Text 18"/>
+            <p:cNvSpPr/>
+            <p:nvPr/>
+          </p:nvSpPr>
+          <p:spPr>
+            <a:xfrm>
+              <a:off x="6995160" y="3246120"/>
+              <a:ext cx="1554480" cy="146304"/>
+            </a:xfrm>
+            <a:prstGeom prst="rect">
+              <a:avLst/>
+            </a:prstGeom>
+            <a:noFill/>
+            <a:ln/>
+          </p:spPr>
+          <p:txBody>
+            <a:bodyPr wrap="square" lIns="0" tIns="0" rIns="0" bIns="0" rtlCol="0" anchor="ctr"/>
+            <a:lstStyle/>
+            <a:p>
+              <a:pPr marL="0" indent="0" algn="ctr">
+                <a:buNone/>
+              </a:pPr>
+              <a:r>
+                <a:rPr lang="en-US" sz="1300" b="1" dirty="0">
+                  <a:solidFill>
+                    <a:srgbClr val="1F77B4"/>
+                  </a:solidFill>
+                </a:rPr>
+                <a:t>worker</a:t>
+              </a:r>
+              <a:endParaRPr lang="en-US" sz="1300" dirty="0"/>
+            </a:p>
+          </p:txBody>
+        </p:sp>
+      </p:grpSp>
       <p:sp>
         <p:nvSpPr>
           <p:cNvPr id="21" name="Shape 19"/>
@@ -3086,7 +3058,7 @@
         </p:nvSpPr>
         <p:spPr>
           <a:xfrm>
-            <a:off x="8915400" y="2697480"/>
+            <a:off x="7358584" y="2668962"/>
             <a:ext cx="640080" cy="0"/>
           </a:xfrm>
           <a:prstGeom prst="line">
@@ -3110,11 +3082,13 @@
         </p:nvSpPr>
         <p:spPr>
           <a:xfrm>
-            <a:off x="9738360" y="2240280"/>
+            <a:off x="7998664" y="2185416"/>
             <a:ext cx="1371600" cy="914400"/>
           </a:xfrm>
           <a:prstGeom prst="chevron">
-            <a:avLst/>
+            <a:avLst>
+              <a:gd name="adj" fmla="val 20297"/>
+            </a:avLst>
           </a:prstGeom>
           <a:solidFill>
             <a:srgbClr val="DCEEE5"/>
@@ -3135,7 +3109,7 @@
         </p:nvSpPr>
         <p:spPr>
           <a:xfrm>
-            <a:off x="9930384" y="2606040"/>
+            <a:off x="8281223" y="2551176"/>
             <a:ext cx="960120" cy="146304"/>
           </a:xfrm>
           <a:prstGeom prst="rect">
@@ -3171,7 +3145,7 @@
         </p:nvSpPr>
         <p:spPr>
           <a:xfrm>
-            <a:off x="6766560" y="4343400"/>
+            <a:off x="972342" y="4707304"/>
             <a:ext cx="4297680" cy="457200"/>
           </a:xfrm>
           <a:prstGeom prst="rect">
@@ -3193,45 +3167,9 @@
                   <a:srgbClr val="0F2F25"/>
                 </a:solidFill>
               </a:rPr>
-              <a:t>Scale by adding workers, not rewriting the code.</a:t>
+              <a:t>Scale by adding workers/increasing EMR cores, not rewriting the code.</a:t>
             </a:r>
             <a:endParaRPr lang="en-US" sz="2200" dirty="0"/>
-          </a:p>
-        </p:txBody>
-      </p:sp>
-      <p:sp>
-        <p:nvSpPr>
-          <p:cNvPr id="25" name="Text 23"/>
-          <p:cNvSpPr/>
-          <p:nvPr/>
-        </p:nvSpPr>
-        <p:spPr>
-          <a:xfrm>
-            <a:off x="6766560" y="4983480"/>
-            <a:ext cx="4480560" cy="320040"/>
-          </a:xfrm>
-          <a:prstGeom prst="rect">
-            <a:avLst/>
-          </a:prstGeom>
-          <a:noFill/>
-          <a:ln/>
-        </p:spPr>
-        <p:txBody>
-          <a:bodyPr wrap="square" lIns="0" tIns="0" rIns="0" bIns="0" rtlCol="0" anchor="ctr"/>
-          <a:lstStyle/>
-          <a:p>
-            <a:pPr marL="0" indent="0">
-              <a:buNone/>
-            </a:pPr>
-            <a:r>
-              <a:rPr lang="en-US" sz="1550" dirty="0">
-                <a:solidFill>
-                  <a:srgbClr val="5B6770"/>
-                </a:solidFill>
-              </a:rPr>
-              <a:t>If a worker fails, the message reappears after the visibility timeout.</a:t>
-            </a:r>
-            <a:endParaRPr lang="en-US" sz="1550" dirty="0"/>
           </a:p>
         </p:txBody>
       </p:sp>
@@ -3274,6 +3212,684 @@
           </a:p>
         </p:txBody>
       </p:sp>
+      <p:grpSp>
+        <p:nvGrpSpPr>
+          <p:cNvPr id="35" name="组合 34">
+            <a:extLst>
+              <a:ext uri="{FF2B5EF4-FFF2-40B4-BE49-F238E27FC236}">
+                <a16:creationId xmlns:a16="http://schemas.microsoft.com/office/drawing/2014/main" id="{6BABA42F-BF3E-1B61-AE0F-B253C5E73A5A}"/>
+              </a:ext>
+            </a:extLst>
+          </p:cNvPr>
+          <p:cNvGrpSpPr/>
+          <p:nvPr/>
+        </p:nvGrpSpPr>
+        <p:grpSpPr>
+          <a:xfrm>
+            <a:off x="6068033" y="1842260"/>
+            <a:ext cx="1199131" cy="1737360"/>
+            <a:chOff x="6903720" y="1828800"/>
+            <a:chExt cx="1737360" cy="1737360"/>
+          </a:xfrm>
+        </p:grpSpPr>
+        <p:sp>
+          <p:nvSpPr>
+            <p:cNvPr id="36" name="Shape 13">
+              <a:extLst>
+                <a:ext uri="{FF2B5EF4-FFF2-40B4-BE49-F238E27FC236}">
+                  <a16:creationId xmlns:a16="http://schemas.microsoft.com/office/drawing/2014/main" id="{A90B17CF-E5B6-6BA5-1B53-C32432C86EDF}"/>
+                </a:ext>
+              </a:extLst>
+            </p:cNvPr>
+            <p:cNvSpPr/>
+            <p:nvPr/>
+          </p:nvSpPr>
+          <p:spPr>
+            <a:xfrm>
+              <a:off x="6903720" y="1828800"/>
+              <a:ext cx="1737360" cy="457200"/>
+            </a:xfrm>
+            <a:prstGeom prst="rect">
+              <a:avLst/>
+            </a:prstGeom>
+            <a:solidFill>
+              <a:srgbClr val="E6F0FA"/>
+            </a:solidFill>
+            <a:ln w="12700">
+              <a:solidFill>
+                <a:srgbClr val="1F77B4"/>
+              </a:solidFill>
+              <a:prstDash val="solid"/>
+            </a:ln>
+          </p:spPr>
+        </p:sp>
+        <p:sp>
+          <p:nvSpPr>
+            <p:cNvPr id="37" name="Text 14">
+              <a:extLst>
+                <a:ext uri="{FF2B5EF4-FFF2-40B4-BE49-F238E27FC236}">
+                  <a16:creationId xmlns:a16="http://schemas.microsoft.com/office/drawing/2014/main" id="{F3825B27-4597-9D69-8209-2F75113745DE}"/>
+                </a:ext>
+              </a:extLst>
+            </p:cNvPr>
+            <p:cNvSpPr/>
+            <p:nvPr/>
+          </p:nvSpPr>
+          <p:spPr>
+            <a:xfrm>
+              <a:off x="6995160" y="1965960"/>
+              <a:ext cx="1554480" cy="146304"/>
+            </a:xfrm>
+            <a:prstGeom prst="rect">
+              <a:avLst/>
+            </a:prstGeom>
+            <a:noFill/>
+            <a:ln/>
+          </p:spPr>
+          <p:txBody>
+            <a:bodyPr wrap="square" lIns="0" tIns="0" rIns="0" bIns="0" rtlCol="0" anchor="ctr"/>
+            <a:lstStyle/>
+            <a:p>
+              <a:pPr marL="0" indent="0" algn="ctr">
+                <a:buNone/>
+              </a:pPr>
+              <a:r>
+                <a:rPr lang="en-US" sz="1300" b="1" dirty="0">
+                  <a:solidFill>
+                    <a:srgbClr val="1F77B4"/>
+                  </a:solidFill>
+                </a:rPr>
+                <a:t>province</a:t>
+              </a:r>
+              <a:endParaRPr lang="en-US" sz="1300" dirty="0"/>
+            </a:p>
+          </p:txBody>
+        </p:sp>
+        <p:sp>
+          <p:nvSpPr>
+            <p:cNvPr id="38" name="Shape 15">
+              <a:extLst>
+                <a:ext uri="{FF2B5EF4-FFF2-40B4-BE49-F238E27FC236}">
+                  <a16:creationId xmlns:a16="http://schemas.microsoft.com/office/drawing/2014/main" id="{2844E60D-FFC0-8D92-150D-FD32E6699A76}"/>
+                </a:ext>
+              </a:extLst>
+            </p:cNvPr>
+            <p:cNvSpPr/>
+            <p:nvPr/>
+          </p:nvSpPr>
+          <p:spPr>
+            <a:xfrm>
+              <a:off x="6903720" y="2468880"/>
+              <a:ext cx="1737360" cy="457200"/>
+            </a:xfrm>
+            <a:prstGeom prst="rect">
+              <a:avLst/>
+            </a:prstGeom>
+            <a:solidFill>
+              <a:srgbClr val="E6F0FA"/>
+            </a:solidFill>
+            <a:ln w="12700">
+              <a:solidFill>
+                <a:srgbClr val="1F77B4"/>
+              </a:solidFill>
+              <a:prstDash val="solid"/>
+            </a:ln>
+          </p:spPr>
+        </p:sp>
+        <p:sp>
+          <p:nvSpPr>
+            <p:cNvPr id="39" name="Text 16">
+              <a:extLst>
+                <a:ext uri="{FF2B5EF4-FFF2-40B4-BE49-F238E27FC236}">
+                  <a16:creationId xmlns:a16="http://schemas.microsoft.com/office/drawing/2014/main" id="{F76FFA4F-7547-A8D5-1280-6BDF1181135C}"/>
+                </a:ext>
+              </a:extLst>
+            </p:cNvPr>
+            <p:cNvSpPr/>
+            <p:nvPr/>
+          </p:nvSpPr>
+          <p:spPr>
+            <a:xfrm>
+              <a:off x="6995160" y="2606040"/>
+              <a:ext cx="1554480" cy="146304"/>
+            </a:xfrm>
+            <a:prstGeom prst="rect">
+              <a:avLst/>
+            </a:prstGeom>
+            <a:noFill/>
+            <a:ln/>
+          </p:spPr>
+          <p:txBody>
+            <a:bodyPr wrap="square" lIns="0" tIns="0" rIns="0" bIns="0" rtlCol="0" anchor="ctr"/>
+            <a:lstStyle/>
+            <a:p>
+              <a:pPr marL="0" indent="0" algn="ctr">
+                <a:buNone/>
+              </a:pPr>
+              <a:r>
+                <a:rPr lang="en-US" sz="1300" b="1" dirty="0">
+                  <a:solidFill>
+                    <a:srgbClr val="1F77B4"/>
+                  </a:solidFill>
+                </a:rPr>
+                <a:t>province</a:t>
+              </a:r>
+              <a:endParaRPr lang="en-US" sz="1300" dirty="0"/>
+            </a:p>
+          </p:txBody>
+        </p:sp>
+        <p:sp>
+          <p:nvSpPr>
+            <p:cNvPr id="40" name="Shape 17">
+              <a:extLst>
+                <a:ext uri="{FF2B5EF4-FFF2-40B4-BE49-F238E27FC236}">
+                  <a16:creationId xmlns:a16="http://schemas.microsoft.com/office/drawing/2014/main" id="{2416589E-1012-46ED-9C8D-97C726451C62}"/>
+                </a:ext>
+              </a:extLst>
+            </p:cNvPr>
+            <p:cNvSpPr/>
+            <p:nvPr/>
+          </p:nvSpPr>
+          <p:spPr>
+            <a:xfrm>
+              <a:off x="6903720" y="3108960"/>
+              <a:ext cx="1737360" cy="457200"/>
+            </a:xfrm>
+            <a:prstGeom prst="rect">
+              <a:avLst/>
+            </a:prstGeom>
+            <a:solidFill>
+              <a:srgbClr val="E6F0FA"/>
+            </a:solidFill>
+            <a:ln w="12700">
+              <a:solidFill>
+                <a:srgbClr val="1F77B4"/>
+              </a:solidFill>
+              <a:prstDash val="solid"/>
+            </a:ln>
+          </p:spPr>
+        </p:sp>
+        <p:sp>
+          <p:nvSpPr>
+            <p:cNvPr id="41" name="Text 18">
+              <a:extLst>
+                <a:ext uri="{FF2B5EF4-FFF2-40B4-BE49-F238E27FC236}">
+                  <a16:creationId xmlns:a16="http://schemas.microsoft.com/office/drawing/2014/main" id="{22B21A7C-70AF-0007-6B4D-23781473D6E8}"/>
+                </a:ext>
+              </a:extLst>
+            </p:cNvPr>
+            <p:cNvSpPr/>
+            <p:nvPr/>
+          </p:nvSpPr>
+          <p:spPr>
+            <a:xfrm>
+              <a:off x="6995160" y="3246120"/>
+              <a:ext cx="1554480" cy="146304"/>
+            </a:xfrm>
+            <a:prstGeom prst="rect">
+              <a:avLst/>
+            </a:prstGeom>
+            <a:noFill/>
+            <a:ln/>
+          </p:spPr>
+          <p:txBody>
+            <a:bodyPr wrap="square" lIns="0" tIns="0" rIns="0" bIns="0" rtlCol="0" anchor="ctr"/>
+            <a:lstStyle/>
+            <a:p>
+              <a:pPr marL="0" indent="0" algn="ctr">
+                <a:buNone/>
+              </a:pPr>
+              <a:r>
+                <a:rPr lang="en-US" sz="1300" b="1" dirty="0">
+                  <a:solidFill>
+                    <a:srgbClr val="1F77B4"/>
+                  </a:solidFill>
+                </a:rPr>
+                <a:t>province</a:t>
+              </a:r>
+              <a:endParaRPr lang="en-US" sz="1300" dirty="0"/>
+            </a:p>
+          </p:txBody>
+        </p:sp>
+      </p:grpSp>
+      <p:sp>
+        <p:nvSpPr>
+          <p:cNvPr id="42" name="Shape 19">
+            <a:extLst>
+              <a:ext uri="{FF2B5EF4-FFF2-40B4-BE49-F238E27FC236}">
+                <a16:creationId xmlns:a16="http://schemas.microsoft.com/office/drawing/2014/main" id="{D034A0FF-CE38-6BAB-4A6C-8B4C2409FB95}"/>
+              </a:ext>
+            </a:extLst>
+          </p:cNvPr>
+          <p:cNvSpPr/>
+          <p:nvPr/>
+        </p:nvSpPr>
+        <p:spPr>
+          <a:xfrm>
+            <a:off x="9485893" y="2654990"/>
+            <a:ext cx="640080" cy="0"/>
+          </a:xfrm>
+          <a:prstGeom prst="line">
+            <a:avLst/>
+          </a:prstGeom>
+          <a:noFill/>
+          <a:ln w="25400">
+            <a:solidFill>
+              <a:srgbClr val="B5C4BB"/>
+            </a:solidFill>
+            <a:prstDash val="solid"/>
+            <a:tailEnd type="triangle"/>
+          </a:ln>
+        </p:spPr>
+      </p:sp>
+      <p:grpSp>
+        <p:nvGrpSpPr>
+          <p:cNvPr id="43" name="组合 42">
+            <a:extLst>
+              <a:ext uri="{FF2B5EF4-FFF2-40B4-BE49-F238E27FC236}">
+                <a16:creationId xmlns:a16="http://schemas.microsoft.com/office/drawing/2014/main" id="{54BCE5E1-69D8-D3BC-C4FD-E610D3CDD2A3}"/>
+              </a:ext>
+            </a:extLst>
+          </p:cNvPr>
+          <p:cNvGrpSpPr/>
+          <p:nvPr/>
+        </p:nvGrpSpPr>
+        <p:grpSpPr>
+          <a:xfrm>
+            <a:off x="6478991" y="4432984"/>
+            <a:ext cx="1199131" cy="1097280"/>
+            <a:chOff x="6903720" y="1828800"/>
+            <a:chExt cx="1737360" cy="1097280"/>
+          </a:xfrm>
+          <a:solidFill>
+            <a:schemeClr val="accent2"/>
+          </a:solidFill>
+        </p:grpSpPr>
+        <p:sp>
+          <p:nvSpPr>
+            <p:cNvPr id="44" name="Shape 13">
+              <a:extLst>
+                <a:ext uri="{FF2B5EF4-FFF2-40B4-BE49-F238E27FC236}">
+                  <a16:creationId xmlns:a16="http://schemas.microsoft.com/office/drawing/2014/main" id="{03908DA5-65C3-7CA9-E826-9CE677B1C7B7}"/>
+                </a:ext>
+              </a:extLst>
+            </p:cNvPr>
+            <p:cNvSpPr/>
+            <p:nvPr/>
+          </p:nvSpPr>
+          <p:spPr>
+            <a:xfrm>
+              <a:off x="6903720" y="1828800"/>
+              <a:ext cx="1737360" cy="457200"/>
+            </a:xfrm>
+            <a:prstGeom prst="rect">
+              <a:avLst/>
+            </a:prstGeom>
+            <a:grpFill/>
+            <a:ln w="12700">
+              <a:solidFill>
+                <a:srgbClr val="1F77B4"/>
+              </a:solidFill>
+              <a:prstDash val="solid"/>
+            </a:ln>
+          </p:spPr>
+        </p:sp>
+        <p:sp>
+          <p:nvSpPr>
+            <p:cNvPr id="45" name="Text 14">
+              <a:extLst>
+                <a:ext uri="{FF2B5EF4-FFF2-40B4-BE49-F238E27FC236}">
+                  <a16:creationId xmlns:a16="http://schemas.microsoft.com/office/drawing/2014/main" id="{46515F71-1F11-6D43-DC04-F2AE2106EDA5}"/>
+                </a:ext>
+              </a:extLst>
+            </p:cNvPr>
+            <p:cNvSpPr/>
+            <p:nvPr/>
+          </p:nvSpPr>
+          <p:spPr>
+            <a:xfrm>
+              <a:off x="6995160" y="1965960"/>
+              <a:ext cx="1554480" cy="146304"/>
+            </a:xfrm>
+            <a:prstGeom prst="rect">
+              <a:avLst/>
+            </a:prstGeom>
+            <a:grpFill/>
+            <a:ln/>
+          </p:spPr>
+          <p:txBody>
+            <a:bodyPr wrap="square" lIns="0" tIns="0" rIns="0" bIns="0" rtlCol="0" anchor="ctr"/>
+            <a:lstStyle/>
+            <a:p>
+              <a:pPr marL="0" indent="0" algn="ctr">
+                <a:buNone/>
+              </a:pPr>
+              <a:r>
+                <a:rPr lang="en-US" sz="1300" b="1" dirty="0">
+                  <a:solidFill>
+                    <a:schemeClr val="bg1"/>
+                  </a:solidFill>
+                </a:rPr>
+                <a:t>NVDI</a:t>
+              </a:r>
+              <a:endParaRPr lang="en-US" sz="1300" dirty="0">
+                <a:solidFill>
+                  <a:schemeClr val="bg1"/>
+                </a:solidFill>
+              </a:endParaRPr>
+            </a:p>
+          </p:txBody>
+        </p:sp>
+        <p:sp>
+          <p:nvSpPr>
+            <p:cNvPr id="46" name="Shape 15">
+              <a:extLst>
+                <a:ext uri="{FF2B5EF4-FFF2-40B4-BE49-F238E27FC236}">
+                  <a16:creationId xmlns:a16="http://schemas.microsoft.com/office/drawing/2014/main" id="{7238FC92-BD29-AEC6-0669-3BCC59E3CFDA}"/>
+                </a:ext>
+              </a:extLst>
+            </p:cNvPr>
+            <p:cNvSpPr/>
+            <p:nvPr/>
+          </p:nvSpPr>
+          <p:spPr>
+            <a:xfrm>
+              <a:off x="6903720" y="2468880"/>
+              <a:ext cx="1737360" cy="457200"/>
+            </a:xfrm>
+            <a:prstGeom prst="rect">
+              <a:avLst/>
+            </a:prstGeom>
+            <a:grpFill/>
+            <a:ln w="12700">
+              <a:solidFill>
+                <a:srgbClr val="1F77B4"/>
+              </a:solidFill>
+              <a:prstDash val="solid"/>
+            </a:ln>
+          </p:spPr>
+        </p:sp>
+        <p:sp>
+          <p:nvSpPr>
+            <p:cNvPr id="47" name="Text 16">
+              <a:extLst>
+                <a:ext uri="{FF2B5EF4-FFF2-40B4-BE49-F238E27FC236}">
+                  <a16:creationId xmlns:a16="http://schemas.microsoft.com/office/drawing/2014/main" id="{00FCAB90-E7F8-55F9-339F-71CC6B156284}"/>
+                </a:ext>
+              </a:extLst>
+            </p:cNvPr>
+            <p:cNvSpPr/>
+            <p:nvPr/>
+          </p:nvSpPr>
+          <p:spPr>
+            <a:xfrm>
+              <a:off x="6995160" y="2606040"/>
+              <a:ext cx="1554480" cy="146304"/>
+            </a:xfrm>
+            <a:prstGeom prst="rect">
+              <a:avLst/>
+            </a:prstGeom>
+            <a:grpFill/>
+            <a:ln/>
+          </p:spPr>
+          <p:txBody>
+            <a:bodyPr wrap="square" lIns="0" tIns="0" rIns="0" bIns="0" rtlCol="0" anchor="ctr"/>
+            <a:lstStyle/>
+            <a:p>
+              <a:pPr marL="0" indent="0" algn="ctr">
+                <a:buNone/>
+              </a:pPr>
+              <a:r>
+                <a:rPr lang="en-US" sz="1300" b="1" dirty="0">
+                  <a:solidFill>
+                    <a:schemeClr val="bg1"/>
+                  </a:solidFill>
+                </a:rPr>
+                <a:t>CGSS</a:t>
+              </a:r>
+              <a:endParaRPr lang="en-US" sz="1300" dirty="0">
+                <a:solidFill>
+                  <a:schemeClr val="bg1"/>
+                </a:solidFill>
+              </a:endParaRPr>
+            </a:p>
+          </p:txBody>
+        </p:sp>
+      </p:grpSp>
+      <p:sp>
+        <p:nvSpPr>
+          <p:cNvPr id="50" name="Shape 19">
+            <a:extLst>
+              <a:ext uri="{FF2B5EF4-FFF2-40B4-BE49-F238E27FC236}">
+                <a16:creationId xmlns:a16="http://schemas.microsoft.com/office/drawing/2014/main" id="{642F126B-96AC-7DA5-7CFE-DED9A51DC28E}"/>
+              </a:ext>
+            </a:extLst>
+          </p:cNvPr>
+          <p:cNvSpPr/>
+          <p:nvPr/>
+        </p:nvSpPr>
+        <p:spPr>
+          <a:xfrm>
+            <a:off x="7831024" y="4976087"/>
+            <a:ext cx="640080" cy="0"/>
+          </a:xfrm>
+          <a:prstGeom prst="line">
+            <a:avLst/>
+          </a:prstGeom>
+          <a:noFill/>
+          <a:ln w="25400">
+            <a:solidFill>
+              <a:srgbClr val="B5C4BB"/>
+            </a:solidFill>
+            <a:prstDash val="solid"/>
+            <a:tailEnd type="triangle"/>
+          </a:ln>
+        </p:spPr>
+      </p:sp>
+      <p:sp>
+        <p:nvSpPr>
+          <p:cNvPr id="52" name="Shape 20">
+            <a:extLst>
+              <a:ext uri="{FF2B5EF4-FFF2-40B4-BE49-F238E27FC236}">
+                <a16:creationId xmlns:a16="http://schemas.microsoft.com/office/drawing/2014/main" id="{B861E9ED-A6F7-194F-B00E-3804293B2607}"/>
+              </a:ext>
+            </a:extLst>
+          </p:cNvPr>
+          <p:cNvSpPr/>
+          <p:nvPr/>
+        </p:nvSpPr>
+        <p:spPr>
+          <a:xfrm>
+            <a:off x="8433623" y="4707303"/>
+            <a:ext cx="1075541" cy="502921"/>
+          </a:xfrm>
+          <a:prstGeom prst="chevron">
+            <a:avLst>
+              <a:gd name="adj" fmla="val 20297"/>
+            </a:avLst>
+          </a:prstGeom>
+          <a:solidFill>
+            <a:srgbClr val="DCEEE5"/>
+          </a:solidFill>
+          <a:ln w="12700">
+            <a:solidFill>
+              <a:srgbClr val="1B9E77"/>
+            </a:solidFill>
+            <a:prstDash val="solid"/>
+          </a:ln>
+        </p:spPr>
+      </p:sp>
+      <p:sp>
+        <p:nvSpPr>
+          <p:cNvPr id="53" name="Text 21">
+            <a:extLst>
+              <a:ext uri="{FF2B5EF4-FFF2-40B4-BE49-F238E27FC236}">
+                <a16:creationId xmlns:a16="http://schemas.microsoft.com/office/drawing/2014/main" id="{22EBD7FA-1EDD-95BF-832C-4910C84FF70D}"/>
+              </a:ext>
+            </a:extLst>
+          </p:cNvPr>
+          <p:cNvSpPr/>
+          <p:nvPr/>
+        </p:nvSpPr>
+        <p:spPr>
+          <a:xfrm>
+            <a:off x="8481361" y="4902935"/>
+            <a:ext cx="960120" cy="146304"/>
+          </a:xfrm>
+          <a:prstGeom prst="rect">
+            <a:avLst/>
+          </a:prstGeom>
+          <a:noFill/>
+          <a:ln/>
+        </p:spPr>
+        <p:txBody>
+          <a:bodyPr wrap="square" lIns="0" tIns="0" rIns="0" bIns="0" rtlCol="0" anchor="ctr"/>
+          <a:lstStyle/>
+          <a:p>
+            <a:pPr marL="0" indent="0" algn="ctr">
+              <a:buNone/>
+            </a:pPr>
+            <a:r>
+              <a:rPr lang="en-US" sz="1400" b="1" dirty="0">
+                <a:solidFill>
+                  <a:srgbClr val="0B5D3B"/>
+                </a:solidFill>
+              </a:rPr>
+              <a:t>EMR</a:t>
+            </a:r>
+            <a:endParaRPr lang="en-US" sz="1400" dirty="0"/>
+          </a:p>
+        </p:txBody>
+      </p:sp>
+      <p:sp>
+        <p:nvSpPr>
+          <p:cNvPr id="54" name="Shape 19">
+            <a:extLst>
+              <a:ext uri="{FF2B5EF4-FFF2-40B4-BE49-F238E27FC236}">
+                <a16:creationId xmlns:a16="http://schemas.microsoft.com/office/drawing/2014/main" id="{5939FF95-B3EC-A399-71D2-221E88D97059}"/>
+              </a:ext>
+            </a:extLst>
+          </p:cNvPr>
+          <p:cNvSpPr/>
+          <p:nvPr/>
+        </p:nvSpPr>
+        <p:spPr>
+          <a:xfrm>
+            <a:off x="9638293" y="4976087"/>
+            <a:ext cx="640080" cy="0"/>
+          </a:xfrm>
+          <a:prstGeom prst="line">
+            <a:avLst/>
+          </a:prstGeom>
+          <a:noFill/>
+          <a:ln w="25400">
+            <a:solidFill>
+              <a:srgbClr val="B5C4BB"/>
+            </a:solidFill>
+            <a:prstDash val="solid"/>
+            <a:tailEnd type="triangle"/>
+          </a:ln>
+        </p:spPr>
+      </p:sp>
+      <p:grpSp>
+        <p:nvGrpSpPr>
+          <p:cNvPr id="55" name="组合 54">
+            <a:extLst>
+              <a:ext uri="{FF2B5EF4-FFF2-40B4-BE49-F238E27FC236}">
+                <a16:creationId xmlns:a16="http://schemas.microsoft.com/office/drawing/2014/main" id="{49262AE1-1C17-ECCD-95AF-65B121F85352}"/>
+              </a:ext>
+            </a:extLst>
+          </p:cNvPr>
+          <p:cNvGrpSpPr/>
+          <p:nvPr/>
+        </p:nvGrpSpPr>
+        <p:grpSpPr>
+          <a:xfrm>
+            <a:off x="10426392" y="4753024"/>
+            <a:ext cx="1199131" cy="457200"/>
+            <a:chOff x="6903720" y="1828800"/>
+            <a:chExt cx="1737360" cy="457200"/>
+          </a:xfrm>
+          <a:solidFill>
+            <a:schemeClr val="accent2"/>
+          </a:solidFill>
+        </p:grpSpPr>
+        <p:sp>
+          <p:nvSpPr>
+            <p:cNvPr id="56" name="Shape 13">
+              <a:extLst>
+                <a:ext uri="{FF2B5EF4-FFF2-40B4-BE49-F238E27FC236}">
+                  <a16:creationId xmlns:a16="http://schemas.microsoft.com/office/drawing/2014/main" id="{71B20B82-6A25-E1A5-EA48-407A8E585CF2}"/>
+                </a:ext>
+              </a:extLst>
+            </p:cNvPr>
+            <p:cNvSpPr/>
+            <p:nvPr/>
+          </p:nvSpPr>
+          <p:spPr>
+            <a:xfrm>
+              <a:off x="6903720" y="1828800"/>
+              <a:ext cx="1737360" cy="457200"/>
+            </a:xfrm>
+            <a:prstGeom prst="rect">
+              <a:avLst/>
+            </a:prstGeom>
+            <a:grpFill/>
+            <a:ln w="12700">
+              <a:solidFill>
+                <a:srgbClr val="1F77B4"/>
+              </a:solidFill>
+              <a:prstDash val="solid"/>
+            </a:ln>
+          </p:spPr>
+        </p:sp>
+        <p:sp>
+          <p:nvSpPr>
+            <p:cNvPr id="57" name="Text 14">
+              <a:extLst>
+                <a:ext uri="{FF2B5EF4-FFF2-40B4-BE49-F238E27FC236}">
+                  <a16:creationId xmlns:a16="http://schemas.microsoft.com/office/drawing/2014/main" id="{ED61B0F4-CCA2-2B85-8E18-09A05B996C81}"/>
+                </a:ext>
+              </a:extLst>
+            </p:cNvPr>
+            <p:cNvSpPr/>
+            <p:nvPr/>
+          </p:nvSpPr>
+          <p:spPr>
+            <a:xfrm>
+              <a:off x="6995160" y="1965960"/>
+              <a:ext cx="1554480" cy="146304"/>
+            </a:xfrm>
+            <a:prstGeom prst="rect">
+              <a:avLst/>
+            </a:prstGeom>
+            <a:grpFill/>
+            <a:ln/>
+          </p:spPr>
+          <p:txBody>
+            <a:bodyPr wrap="square" lIns="0" tIns="0" rIns="0" bIns="0" rtlCol="0" anchor="ctr"/>
+            <a:lstStyle/>
+            <a:p>
+              <a:pPr marL="0" indent="0" algn="ctr">
+                <a:buNone/>
+              </a:pPr>
+              <a:r>
+                <a:rPr lang="en-US" sz="1300" b="1" dirty="0">
+                  <a:solidFill>
+                    <a:schemeClr val="bg1"/>
+                  </a:solidFill>
+                </a:rPr>
+                <a:t>Regression Output</a:t>
+              </a:r>
+              <a:endParaRPr lang="en-US" sz="1300" dirty="0">
+                <a:solidFill>
+                  <a:schemeClr val="bg1"/>
+                </a:solidFill>
+              </a:endParaRPr>
+            </a:p>
+          </p:txBody>
+        </p:sp>
+      </p:grpSp>
     </p:spTree>
   </p:cSld>
   <p:clrMapOvr>
@@ -3418,7 +4034,7 @@
         </p:nvSpPr>
         <p:spPr>
           <a:xfrm>
-            <a:off x="2331720" y="2688336"/>
+            <a:off x="2200221" y="1828800"/>
             <a:ext cx="320040" cy="0"/>
           </a:xfrm>
           <a:prstGeom prst="line">
@@ -3442,7 +4058,7 @@
         </p:nvSpPr>
         <p:spPr>
           <a:xfrm>
-            <a:off x="4251960" y="2688336"/>
+            <a:off x="4120461" y="1828800"/>
             <a:ext cx="320040" cy="0"/>
           </a:xfrm>
           <a:prstGeom prst="line">
@@ -3466,7 +4082,7 @@
         </p:nvSpPr>
         <p:spPr>
           <a:xfrm>
-            <a:off x="6172200" y="2688336"/>
+            <a:off x="6040701" y="1828800"/>
             <a:ext cx="320040" cy="0"/>
           </a:xfrm>
           <a:prstGeom prst="line">
@@ -3490,7 +4106,7 @@
         </p:nvSpPr>
         <p:spPr>
           <a:xfrm>
-            <a:off x="8092440" y="2688336"/>
+            <a:off x="7960941" y="1828800"/>
             <a:ext cx="320040" cy="0"/>
           </a:xfrm>
           <a:prstGeom prst="line">
@@ -3514,7 +4130,7 @@
         </p:nvSpPr>
         <p:spPr>
           <a:xfrm>
-            <a:off x="10012680" y="2688336"/>
+            <a:off x="9881181" y="1828800"/>
             <a:ext cx="320040" cy="0"/>
           </a:xfrm>
           <a:prstGeom prst="line">
@@ -3538,7 +4154,7 @@
         </p:nvSpPr>
         <p:spPr>
           <a:xfrm>
-            <a:off x="777240" y="2331720"/>
+            <a:off x="645741" y="1472184"/>
             <a:ext cx="1508760" cy="713232"/>
           </a:xfrm>
           <a:prstGeom prst="roundRect">
@@ -3565,7 +4181,7 @@
         </p:nvSpPr>
         <p:spPr>
           <a:xfrm>
-            <a:off x="841248" y="2578608"/>
+            <a:off x="709749" y="1719072"/>
             <a:ext cx="1380744" cy="146304"/>
           </a:xfrm>
           <a:prstGeom prst="rect">
@@ -3601,7 +4217,7 @@
         </p:nvSpPr>
         <p:spPr>
           <a:xfrm>
-            <a:off x="2697480" y="2331720"/>
+            <a:off x="2565981" y="1472184"/>
             <a:ext cx="1508760" cy="713232"/>
           </a:xfrm>
           <a:prstGeom prst="roundRect">
@@ -3628,7 +4244,7 @@
         </p:nvSpPr>
         <p:spPr>
           <a:xfrm>
-            <a:off x="2761488" y="2578608"/>
+            <a:off x="2629989" y="1719072"/>
             <a:ext cx="1380744" cy="146304"/>
           </a:xfrm>
           <a:prstGeom prst="rect">
@@ -3664,7 +4280,7 @@
         </p:nvSpPr>
         <p:spPr>
           <a:xfrm>
-            <a:off x="4617720" y="2331720"/>
+            <a:off x="4486221" y="1472184"/>
             <a:ext cx="1508760" cy="713232"/>
           </a:xfrm>
           <a:prstGeom prst="roundRect">
@@ -3691,7 +4307,7 @@
         </p:nvSpPr>
         <p:spPr>
           <a:xfrm>
-            <a:off x="4681728" y="2578608"/>
+            <a:off x="4550229" y="1719072"/>
             <a:ext cx="1380744" cy="146304"/>
           </a:xfrm>
           <a:prstGeom prst="rect">
@@ -3727,7 +4343,7 @@
         </p:nvSpPr>
         <p:spPr>
           <a:xfrm>
-            <a:off x="6537960" y="2331720"/>
+            <a:off x="6406461" y="1472184"/>
             <a:ext cx="1508760" cy="713232"/>
           </a:xfrm>
           <a:prstGeom prst="roundRect">
@@ -3754,7 +4370,7 @@
         </p:nvSpPr>
         <p:spPr>
           <a:xfrm>
-            <a:off x="6601968" y="2578608"/>
+            <a:off x="6470469" y="1719072"/>
             <a:ext cx="1380744" cy="146304"/>
           </a:xfrm>
           <a:prstGeom prst="rect">
@@ -3790,7 +4406,7 @@
         </p:nvSpPr>
         <p:spPr>
           <a:xfrm>
-            <a:off x="8458200" y="2331720"/>
+            <a:off x="8326701" y="1472184"/>
             <a:ext cx="1508760" cy="713232"/>
           </a:xfrm>
           <a:prstGeom prst="roundRect">
@@ -3817,7 +4433,7 @@
         </p:nvSpPr>
         <p:spPr>
           <a:xfrm>
-            <a:off x="8522208" y="2578608"/>
+            <a:off x="8390709" y="1719072"/>
             <a:ext cx="1380744" cy="146304"/>
           </a:xfrm>
           <a:prstGeom prst="rect">
@@ -3853,7 +4469,7 @@
         </p:nvSpPr>
         <p:spPr>
           <a:xfrm>
-            <a:off x="10378440" y="2331720"/>
+            <a:off x="10246941" y="1472184"/>
             <a:ext cx="1508760" cy="713232"/>
           </a:xfrm>
           <a:prstGeom prst="roundRect">
@@ -3880,7 +4496,7 @@
         </p:nvSpPr>
         <p:spPr>
           <a:xfrm>
-            <a:off x="10442448" y="2578608"/>
+            <a:off x="10310949" y="1719072"/>
             <a:ext cx="1380744" cy="146304"/>
           </a:xfrm>
           <a:prstGeom prst="rect">
@@ -3910,50 +4526,14 @@
       </p:sp>
       <p:sp>
         <p:nvSpPr>
-          <p:cNvPr id="22" name="Text 20"/>
-          <p:cNvSpPr/>
-          <p:nvPr/>
-        </p:nvSpPr>
-        <p:spPr>
-          <a:xfrm>
-            <a:off x="777240" y="1234440"/>
-            <a:ext cx="6217920" cy="320040"/>
-          </a:xfrm>
-          <a:prstGeom prst="rect">
-            <a:avLst/>
-          </a:prstGeom>
-          <a:noFill/>
-          <a:ln/>
-        </p:spPr>
-        <p:txBody>
-          <a:bodyPr wrap="square" lIns="0" tIns="0" rIns="0" bIns="0" rtlCol="0" anchor="ctr"/>
-          <a:lstStyle/>
-          <a:p>
-            <a:pPr marL="0" indent="0">
-              <a:buNone/>
-            </a:pPr>
-            <a:r>
-              <a:rPr lang="en-US" sz="2400" b="1" dirty="0">
-                <a:solidFill>
-                  <a:srgbClr val="0F2F25"/>
-                </a:solidFill>
-              </a:rPr>
-              <a:t>Modular storage, scheduling, compute, and analysis</a:t>
-            </a:r>
-            <a:endParaRPr lang="en-US" sz="2400" dirty="0"/>
-          </a:p>
-        </p:txBody>
-      </p:sp>
-      <p:sp>
-        <p:nvSpPr>
           <p:cNvPr id="23" name="Text 21"/>
           <p:cNvSpPr/>
           <p:nvPr/>
         </p:nvSpPr>
         <p:spPr>
           <a:xfrm>
-            <a:off x="777240" y="3657600"/>
-            <a:ext cx="10561320" cy="1005840"/>
+            <a:off x="777240" y="2715768"/>
+            <a:ext cx="10561320" cy="3941064"/>
           </a:xfrm>
           <a:prstGeom prst="rect">
             <a:avLst/>
@@ -3967,113 +4547,65 @@
           </a:bodyPr>
           <a:lstStyle/>
           <a:p>
-            <a:pPr marL="0" indent="0">
-              <a:buNone/>
-            </a:pPr>
-            <a:r>
-              <a:rPr lang="en-US" sz="1800" dirty="0">
-                <a:solidFill>
-                  <a:srgbClr val="0F2F25"/>
-                </a:solidFill>
-              </a:rPr>
-              <a:t>Inputs: scripts, boundaries, province manifests, and cleaned CGSS CSV are kept in S3. SQS schedules one province per message. Stateless EC2 workers consume tasks and upload outputs. EMR Spark merges the outputs with survey data and runs regressions.</a:t>
-            </a:r>
-            <a:endParaRPr lang="en-US" sz="1800" dirty="0"/>
-          </a:p>
-        </p:txBody>
-      </p:sp>
-      <p:sp>
-        <p:nvSpPr>
-          <p:cNvPr id="24" name="Shape 22"/>
-          <p:cNvSpPr/>
-          <p:nvPr/>
-        </p:nvSpPr>
-        <p:spPr>
-          <a:xfrm>
-            <a:off x="777240" y="5074920"/>
-            <a:ext cx="10561320" cy="0"/>
-          </a:xfrm>
-          <a:prstGeom prst="line">
-            <a:avLst/>
-          </a:prstGeom>
-          <a:noFill/>
-          <a:ln w="12700">
-            <a:solidFill>
-              <a:srgbClr val="B5C4BB"/>
-            </a:solidFill>
-            <a:prstDash val="solid"/>
-          </a:ln>
-        </p:spPr>
-      </p:sp>
-      <p:sp>
-        <p:nvSpPr>
-          <p:cNvPr id="25" name="Text 23"/>
-          <p:cNvSpPr/>
-          <p:nvPr/>
-        </p:nvSpPr>
-        <p:spPr>
-          <a:xfrm>
-            <a:off x="777240" y="5440680"/>
-            <a:ext cx="2468880" cy="228600"/>
-          </a:xfrm>
-          <a:prstGeom prst="rect">
-            <a:avLst/>
-          </a:prstGeom>
-          <a:noFill/>
-          <a:ln/>
-        </p:spPr>
-        <p:txBody>
-          <a:bodyPr wrap="square" lIns="0" tIns="0" rIns="0" bIns="0" rtlCol="0" anchor="ctr"/>
-          <a:lstStyle/>
-          <a:p>
-            <a:pPr marL="0" indent="0">
-              <a:buNone/>
-            </a:pPr>
-            <a:r>
-              <a:rPr lang="en-US" sz="1600" b="1" dirty="0">
-                <a:solidFill>
-                  <a:srgbClr val="0B5D3B"/>
-                </a:solidFill>
-              </a:rPr>
-              <a:t>Scalability principle</a:t>
-            </a:r>
-            <a:endParaRPr lang="en-US" sz="1600" dirty="0"/>
-          </a:p>
-        </p:txBody>
-      </p:sp>
-      <p:sp>
-        <p:nvSpPr>
-          <p:cNvPr id="26" name="Text 24"/>
-          <p:cNvSpPr/>
-          <p:nvPr/>
-        </p:nvSpPr>
-        <p:spPr>
-          <a:xfrm>
-            <a:off x="3429000" y="5413248"/>
-            <a:ext cx="7680960" cy="347472"/>
-          </a:xfrm>
-          <a:prstGeom prst="rect">
-            <a:avLst/>
-          </a:prstGeom>
-          <a:noFill/>
-          <a:ln/>
-        </p:spPr>
-        <p:txBody>
-          <a:bodyPr wrap="square" lIns="0" tIns="0" rIns="0" bIns="0" rtlCol="0" anchor="ctr"/>
-          <a:lstStyle/>
-          <a:p>
-            <a:pPr marL="0" indent="0">
-              <a:buNone/>
-            </a:pPr>
-            <a:r>
-              <a:rPr lang="en-US" sz="1700" dirty="0">
-                <a:solidFill>
-                  <a:srgbClr val="5B6770"/>
-                </a:solidFill>
-              </a:rPr>
-              <a:t>More provinces, years, or vegetation indices can be handled by adding task messages and workers rather than changing the underlying computation.</a:t>
-            </a:r>
-            <a:endParaRPr lang="en-US" sz="1700" dirty="0"/>
+            <a:r>
+              <a:rPr lang="en-US" altLang="zh-CN" sz="2000" b="1" dirty="0"/>
+              <a:t>Pipeline 0: </a:t>
+            </a:r>
+            <a:r>
+              <a:rPr lang="en-US" altLang="zh-CN" sz="2000" dirty="0"/>
+              <a:t>Download S3 links to NDVI files automated by interacting with NASA's public API</a:t>
+            </a:r>
+          </a:p>
+          <a:p>
+            <a:endParaRPr lang="en-US" altLang="zh-CN" dirty="0"/>
+          </a:p>
+          <a:p>
+            <a:r>
+              <a:rPr lang="en-US" altLang="zh-CN" sz="2000" b="1" dirty="0"/>
+              <a:t>Pipeline 1: </a:t>
+            </a:r>
+            <a:r>
+              <a:rPr lang="en-US" altLang="zh-CN" sz="2000" dirty="0"/>
+              <a:t>NDVI pipeline that uses SQS queue and EC2 workers to download satellite data and compute annual and provincial NDVI averages. </a:t>
+            </a:r>
+          </a:p>
+          <a:p>
+            <a:r>
+              <a:rPr lang="en-US" altLang="zh-CN" dirty="0"/>
+              <a:t>	</a:t>
+            </a:r>
+            <a:r>
+              <a:rPr lang="en-US" altLang="zh-CN" sz="2000" dirty="0"/>
+              <a:t>Separates the problem into independent province-level to allow parallel processing</a:t>
+            </a:r>
+          </a:p>
+          <a:p>
+            <a:r>
+              <a:rPr lang="en-US" altLang="zh-CN" sz="2000" dirty="0"/>
+              <a:t>	Scalable by adding more/larger workers</a:t>
+            </a:r>
+          </a:p>
+          <a:p>
+            <a:endParaRPr lang="en-US" altLang="zh-CN" dirty="0"/>
+          </a:p>
+          <a:p>
+            <a:r>
+              <a:rPr lang="en-US" altLang="zh-CN" sz="2000" b="1" dirty="0"/>
+              <a:t>Pipeline 2: </a:t>
+            </a:r>
+            <a:r>
+              <a:rPr lang="en-US" altLang="zh-CN" sz="2000" dirty="0"/>
+              <a:t>EMR Spark pipeline that conducts regression of NDVI data from the first pipeline on the CGSS outcome variables</a:t>
+            </a:r>
+          </a:p>
+          <a:p>
+            <a:r>
+              <a:rPr lang="en-US" altLang="zh-CN" sz="2000" dirty="0"/>
+              <a:t>	 Scalable by increasing the number of EMR core/task nodes</a:t>
+            </a:r>
+          </a:p>
+          <a:p>
+            <a:endParaRPr lang="en-US" altLang="zh-CN" dirty="0"/>
           </a:p>
         </p:txBody>
       </p:sp>
@@ -4246,7 +4778,7 @@
                 <a:ea typeface="Aptos Display" pitchFamily="34" charset="-122"/>
                 <a:cs typeface="Aptos Display" pitchFamily="34" charset="-120"/>
               </a:rPr>
-              <a:t>From Shanghai pilot to full distributed run</a:t>
+              <a:t>Scaling and Optimization</a:t>
             </a:r>
             <a:endParaRPr lang="en-US" sz="3000" dirty="0"/>
           </a:p>
@@ -4282,7 +4814,7 @@
                   <a:srgbClr val="0F2F25"/>
                 </a:solidFill>
               </a:rPr>
-              <a:t>Testing workflow, made concise</a:t>
+              <a:t>Testing workflow</a:t>
             </a:r>
             <a:endParaRPr lang="en-US" sz="2000" dirty="0"/>
           </a:p>
@@ -4290,13 +4822,13 @@
       </p:sp>
       <p:sp>
         <p:nvSpPr>
-          <p:cNvPr id="6" name="Shape 4"/>
-          <p:cNvSpPr/>
-          <p:nvPr/>
-        </p:nvSpPr>
-        <p:spPr>
-          <a:xfrm>
-            <a:off x="713232" y="1810512"/>
+          <p:cNvPr id="8" name="Shape 6"/>
+          <p:cNvSpPr/>
+          <p:nvPr/>
+        </p:nvSpPr>
+        <p:spPr>
+          <a:xfrm>
+            <a:off x="612649" y="1891283"/>
             <a:ext cx="91440" cy="91440"/>
           </a:xfrm>
           <a:prstGeom prst="ellipse">
@@ -4315,13 +4847,13 @@
       </p:sp>
       <p:sp>
         <p:nvSpPr>
-          <p:cNvPr id="7" name="Text 5"/>
-          <p:cNvSpPr/>
-          <p:nvPr/>
-        </p:nvSpPr>
-        <p:spPr>
-          <a:xfrm>
-            <a:off x="914400" y="1737360"/>
+          <p:cNvPr id="9" name="Text 7"/>
+          <p:cNvSpPr/>
+          <p:nvPr/>
+        </p:nvSpPr>
+        <p:spPr>
+          <a:xfrm>
+            <a:off x="813817" y="1887147"/>
             <a:ext cx="5303520" cy="384048"/>
           </a:xfrm>
           <a:prstGeom prst="rect">
@@ -4332,7 +4864,7 @@
         </p:spPr>
         <p:txBody>
           <a:bodyPr wrap="square" lIns="254" tIns="254" rIns="254" bIns="254" rtlCol="0" anchor="ctr">
-            <a:normAutofit/>
+            <a:noAutofit/>
           </a:bodyPr>
           <a:lstStyle/>
           <a:p>
@@ -4340,7 +4872,7 @@
               <a:buNone/>
             </a:pPr>
             <a:r>
-              <a:rPr lang="en-US" sz="1650" dirty="0">
+              <a:rPr lang="en-US" dirty="0">
                 <a:solidFill>
                   <a:srgbClr val="0F2F25"/>
                 </a:solidFill>
@@ -4348,21 +4880,21 @@
                 <a:ea typeface="Aptos" pitchFamily="34" charset="-122"/>
                 <a:cs typeface="Aptos" pitchFamily="34" charset="-120"/>
               </a:rPr>
-              <a:t>Filter Earthdata links to NDVI-only S3 manifests</a:t>
-            </a:r>
-            <a:endParaRPr lang="en-US" sz="1650" dirty="0"/>
-          </a:p>
-        </p:txBody>
-      </p:sp>
-      <p:sp>
-        <p:nvSpPr>
-          <p:cNvPr id="8" name="Shape 6"/>
-          <p:cNvSpPr/>
-          <p:nvPr/>
-        </p:nvSpPr>
-        <p:spPr>
-          <a:xfrm>
-            <a:off x="713232" y="2340864"/>
+              <a:t>Run Shanghai locally: parse dates, mosaic tiles, clip to ADM1 boundary</a:t>
+            </a:r>
+            <a:endParaRPr lang="en-US" dirty="0"/>
+          </a:p>
+        </p:txBody>
+      </p:sp>
+      <p:sp>
+        <p:nvSpPr>
+          <p:cNvPr id="10" name="Shape 8"/>
+          <p:cNvSpPr/>
+          <p:nvPr/>
+        </p:nvSpPr>
+        <p:spPr>
+          <a:xfrm>
+            <a:off x="612649" y="2490651"/>
             <a:ext cx="91440" cy="91440"/>
           </a:xfrm>
           <a:prstGeom prst="ellipse">
@@ -4381,14 +4913,14 @@
       </p:sp>
       <p:sp>
         <p:nvSpPr>
-          <p:cNvPr id="9" name="Text 7"/>
-          <p:cNvSpPr/>
-          <p:nvPr/>
-        </p:nvSpPr>
-        <p:spPr>
-          <a:xfrm>
-            <a:off x="914400" y="2267712"/>
-            <a:ext cx="5303520" cy="384048"/>
+          <p:cNvPr id="11" name="Text 9"/>
+          <p:cNvSpPr/>
+          <p:nvPr/>
+        </p:nvSpPr>
+        <p:spPr>
+          <a:xfrm>
+            <a:off x="813817" y="2417499"/>
+            <a:ext cx="5303520" cy="603504"/>
           </a:xfrm>
           <a:prstGeom prst="rect">
             <a:avLst/>
@@ -4398,7 +4930,7 @@
         </p:spPr>
         <p:txBody>
           <a:bodyPr wrap="square" lIns="254" tIns="254" rIns="254" bIns="254" rtlCol="0" anchor="ctr">
-            <a:normAutofit fontScale="92500" lnSpcReduction="20000"/>
+            <a:noAutofit/>
           </a:bodyPr>
           <a:lstStyle/>
           <a:p>
@@ -4406,7 +4938,7 @@
               <a:buNone/>
             </a:pPr>
             <a:r>
-              <a:rPr lang="en-US" sz="1650" dirty="0">
+              <a:rPr lang="en-US" dirty="0">
                 <a:solidFill>
                   <a:srgbClr val="0F2F25"/>
                 </a:solidFill>
@@ -4414,21 +4946,21 @@
                 <a:ea typeface="Aptos" pitchFamily="34" charset="-122"/>
                 <a:cs typeface="Aptos" pitchFamily="34" charset="-120"/>
               </a:rPr>
-              <a:t>Run Shanghai locally: parse dates, mosaic tiles, clip to ADM1 boundary</a:t>
-            </a:r>
-            <a:endParaRPr lang="en-US" sz="1650" dirty="0"/>
-          </a:p>
-        </p:txBody>
-      </p:sp>
-      <p:sp>
-        <p:nvSpPr>
-          <p:cNvPr id="10" name="Shape 8"/>
-          <p:cNvSpPr/>
-          <p:nvPr/>
-        </p:nvSpPr>
-        <p:spPr>
-          <a:xfrm>
-            <a:off x="713232" y="2871216"/>
+              <a:t>Move same workflow to EC2 with NASA temporary S3 credentials</a:t>
+            </a:r>
+            <a:endParaRPr lang="en-US" dirty="0"/>
+          </a:p>
+        </p:txBody>
+      </p:sp>
+      <p:sp>
+        <p:nvSpPr>
+          <p:cNvPr id="12" name="Shape 10"/>
+          <p:cNvSpPr/>
+          <p:nvPr/>
+        </p:nvSpPr>
+        <p:spPr>
+          <a:xfrm>
+            <a:off x="598713" y="3168396"/>
             <a:ext cx="91440" cy="91440"/>
           </a:xfrm>
           <a:prstGeom prst="ellipse">
@@ -4447,14 +4979,14 @@
       </p:sp>
       <p:sp>
         <p:nvSpPr>
-          <p:cNvPr id="11" name="Text 9"/>
-          <p:cNvSpPr/>
-          <p:nvPr/>
-        </p:nvSpPr>
-        <p:spPr>
-          <a:xfrm>
-            <a:off x="914400" y="2798064"/>
-            <a:ext cx="5303520" cy="384048"/>
+          <p:cNvPr id="13" name="Text 11"/>
+          <p:cNvSpPr/>
+          <p:nvPr/>
+        </p:nvSpPr>
+        <p:spPr>
+          <a:xfrm>
+            <a:off x="813817" y="2947849"/>
+            <a:ext cx="5303520" cy="3008813"/>
           </a:xfrm>
           <a:prstGeom prst="rect">
             <a:avLst/>
@@ -4464,7 +4996,7 @@
         </p:spPr>
         <p:txBody>
           <a:bodyPr wrap="square" lIns="254" tIns="254" rIns="254" bIns="254" rtlCol="0" anchor="ctr">
-            <a:normAutofit fontScale="92500"/>
+            <a:noAutofit/>
           </a:bodyPr>
           <a:lstStyle/>
           <a:p>
@@ -4472,7 +5004,7 @@
               <a:buNone/>
             </a:pPr>
             <a:r>
-              <a:rPr lang="en-US" sz="1650" dirty="0">
+              <a:rPr lang="en-US" dirty="0">
                 <a:solidFill>
                   <a:srgbClr val="0F2F25"/>
                 </a:solidFill>
@@ -4480,21 +5012,423 @@
                 <a:ea typeface="Aptos" pitchFamily="34" charset="-122"/>
                 <a:cs typeface="Aptos" pitchFamily="34" charset="-120"/>
               </a:rPr>
-              <a:t>Move same workflow to EC2 with NASA temporary S3 credentials</a:t>
-            </a:r>
-            <a:endParaRPr lang="en-US" sz="1650" dirty="0"/>
-          </a:p>
-        </p:txBody>
-      </p:sp>
-      <p:sp>
-        <p:nvSpPr>
-          <p:cNvPr id="12" name="Shape 10"/>
-          <p:cNvSpPr/>
-          <p:nvPr/>
-        </p:nvSpPr>
-        <p:spPr>
-          <a:xfrm>
-            <a:off x="713232" y="3401568"/>
+              <a:t>Fix hidden CRLF manifest issue and verify S3 upload of outputs</a:t>
+            </a:r>
+          </a:p>
+          <a:p>
+            <a:pPr marL="0" indent="0">
+              <a:buNone/>
+            </a:pPr>
+            <a:endParaRPr lang="en-US" dirty="0">
+              <a:solidFill>
+                <a:srgbClr val="0F2F25"/>
+              </a:solidFill>
+              <a:latin typeface="Aptos" pitchFamily="34" charset="0"/>
+              <a:ea typeface="Aptos" pitchFamily="34" charset="-122"/>
+              <a:cs typeface="Aptos" pitchFamily="34" charset="-120"/>
+            </a:endParaRPr>
+          </a:p>
+          <a:p>
+            <a:r>
+              <a:rPr lang="en-US" altLang="zh-CN" dirty="0">
+                <a:solidFill>
+                  <a:srgbClr val="0F2F25"/>
+                </a:solidFill>
+                <a:latin typeface="Aptos" pitchFamily="34" charset="0"/>
+              </a:rPr>
+              <a:t>Optimize by switching from date-based calculation design to block-based design: processes the NDVI images in smaller spatial chunks and then records only the sum of valid NDVI pixels and the number of valid pixels.</a:t>
+            </a:r>
+          </a:p>
+          <a:p>
+            <a:endParaRPr lang="en-US" altLang="zh-CN" dirty="0">
+              <a:solidFill>
+                <a:srgbClr val="0F2F25"/>
+              </a:solidFill>
+              <a:latin typeface="Aptos" pitchFamily="34" charset="0"/>
+            </a:endParaRPr>
+          </a:p>
+          <a:p>
+            <a:pPr marL="0" indent="0">
+              <a:buNone/>
+            </a:pPr>
+            <a:r>
+              <a:rPr lang="en-US" dirty="0"/>
+              <a:t>Then switch to full run</a:t>
+            </a:r>
+          </a:p>
+        </p:txBody>
+      </p:sp>
+      <p:sp>
+        <p:nvSpPr>
+          <p:cNvPr id="14" name="Shape 12"/>
+          <p:cNvSpPr/>
+          <p:nvPr/>
+        </p:nvSpPr>
+        <p:spPr>
+          <a:xfrm>
+            <a:off x="6172200" y="1188720"/>
+            <a:ext cx="0" cy="4526280"/>
+          </a:xfrm>
+          <a:prstGeom prst="line">
+            <a:avLst/>
+          </a:prstGeom>
+          <a:noFill/>
+          <a:ln w="13970">
+            <a:solidFill>
+              <a:srgbClr val="B5C4BB"/>
+            </a:solidFill>
+            <a:prstDash val="solid"/>
+          </a:ln>
+        </p:spPr>
+      </p:sp>
+      <p:sp>
+        <p:nvSpPr>
+          <p:cNvPr id="15" name="Text 13"/>
+          <p:cNvSpPr/>
+          <p:nvPr/>
+        </p:nvSpPr>
+        <p:spPr>
+          <a:xfrm>
+            <a:off x="6629400" y="1234440"/>
+            <a:ext cx="3931920" cy="274320"/>
+          </a:xfrm>
+          <a:prstGeom prst="rect">
+            <a:avLst/>
+          </a:prstGeom>
+          <a:noFill/>
+          <a:ln/>
+        </p:spPr>
+        <p:txBody>
+          <a:bodyPr wrap="square" lIns="0" tIns="0" rIns="0" bIns="0" rtlCol="0" anchor="ctr"/>
+          <a:lstStyle/>
+          <a:p>
+            <a:pPr marL="0" indent="0">
+              <a:buNone/>
+            </a:pPr>
+            <a:r>
+              <a:rPr lang="en-US" sz="2000" b="1" dirty="0">
+                <a:solidFill>
+                  <a:srgbClr val="0F2F25"/>
+                </a:solidFill>
+              </a:rPr>
+              <a:t>Full pipeline scale-up</a:t>
+            </a:r>
+            <a:endParaRPr lang="en-US" sz="2000" dirty="0"/>
+          </a:p>
+        </p:txBody>
+      </p:sp>
+      <p:sp>
+        <p:nvSpPr>
+          <p:cNvPr id="16" name="Shape 14"/>
+          <p:cNvSpPr/>
+          <p:nvPr/>
+        </p:nvSpPr>
+        <p:spPr>
+          <a:xfrm>
+            <a:off x="6675120" y="1783080"/>
+            <a:ext cx="2926080" cy="310896"/>
+          </a:xfrm>
+          <a:prstGeom prst="roundRect">
+            <a:avLst>
+              <a:gd name="adj" fmla="val 23529"/>
+            </a:avLst>
+          </a:prstGeom>
+          <a:solidFill>
+            <a:srgbClr val="E6F0FA"/>
+          </a:solidFill>
+          <a:ln w="12700">
+            <a:solidFill>
+              <a:srgbClr val="E6F0FA"/>
+            </a:solidFill>
+            <a:prstDash val="solid"/>
+          </a:ln>
+        </p:spPr>
+      </p:sp>
+      <p:sp>
+        <p:nvSpPr>
+          <p:cNvPr id="17" name="Text 15"/>
+          <p:cNvSpPr/>
+          <p:nvPr/>
+        </p:nvSpPr>
+        <p:spPr>
+          <a:xfrm>
+            <a:off x="6766560" y="1847088"/>
+            <a:ext cx="2743200" cy="146304"/>
+          </a:xfrm>
+          <a:prstGeom prst="rect">
+            <a:avLst/>
+          </a:prstGeom>
+          <a:noFill/>
+          <a:ln/>
+        </p:spPr>
+        <p:txBody>
+          <a:bodyPr wrap="square" lIns="0" tIns="0" rIns="0" bIns="0" rtlCol="0" anchor="ctr"/>
+          <a:lstStyle/>
+          <a:p>
+            <a:pPr marL="0" indent="0" algn="ctr">
+              <a:buNone/>
+            </a:pPr>
+            <a:r>
+              <a:rPr lang="en-US" sz="1050" b="1" dirty="0">
+                <a:solidFill>
+                  <a:srgbClr val="0B5D3B"/>
+                </a:solidFill>
+                <a:latin typeface="Aptos" pitchFamily="34" charset="0"/>
+                <a:ea typeface="Aptos" pitchFamily="34" charset="-122"/>
+                <a:cs typeface="Aptos" pitchFamily="34" charset="-120"/>
+              </a:rPr>
+              <a:t>28 provinces with NDVI outputs</a:t>
+            </a:r>
+            <a:endParaRPr lang="en-US" sz="1050" dirty="0"/>
+          </a:p>
+        </p:txBody>
+      </p:sp>
+      <p:sp>
+        <p:nvSpPr>
+          <p:cNvPr id="18" name="Shape 16"/>
+          <p:cNvSpPr/>
+          <p:nvPr/>
+        </p:nvSpPr>
+        <p:spPr>
+          <a:xfrm>
+            <a:off x="6675120" y="2331720"/>
+            <a:ext cx="3200400" cy="310896"/>
+          </a:xfrm>
+          <a:prstGeom prst="roundRect">
+            <a:avLst>
+              <a:gd name="adj" fmla="val 23529"/>
+            </a:avLst>
+          </a:prstGeom>
+          <a:solidFill>
+            <a:srgbClr val="DCEEE5"/>
+          </a:solidFill>
+          <a:ln w="12700">
+            <a:solidFill>
+              <a:srgbClr val="DCEEE5"/>
+            </a:solidFill>
+            <a:prstDash val="solid"/>
+          </a:ln>
+        </p:spPr>
+      </p:sp>
+      <p:sp>
+        <p:nvSpPr>
+          <p:cNvPr id="19" name="Text 17"/>
+          <p:cNvSpPr/>
+          <p:nvPr/>
+        </p:nvSpPr>
+        <p:spPr>
+          <a:xfrm>
+            <a:off x="6766560" y="2395728"/>
+            <a:ext cx="3017520" cy="146304"/>
+          </a:xfrm>
+          <a:prstGeom prst="rect">
+            <a:avLst/>
+          </a:prstGeom>
+          <a:noFill/>
+          <a:ln/>
+        </p:spPr>
+        <p:txBody>
+          <a:bodyPr wrap="square" lIns="0" tIns="0" rIns="0" bIns="0" rtlCol="0" anchor="ctr"/>
+          <a:lstStyle/>
+          <a:p>
+            <a:pPr marL="0" indent="0" algn="ctr">
+              <a:buNone/>
+            </a:pPr>
+            <a:r>
+              <a:rPr lang="en-US" sz="1050" b="1" dirty="0">
+                <a:solidFill>
+                  <a:srgbClr val="0B5D3B"/>
+                </a:solidFill>
+                <a:latin typeface="Aptos" pitchFamily="34" charset="0"/>
+                <a:ea typeface="Aptos" pitchFamily="34" charset="-122"/>
+                <a:cs typeface="Aptos" pitchFamily="34" charset="-120"/>
+              </a:rPr>
+              <a:t>11,061 CGSS observations merged</a:t>
+            </a:r>
+            <a:endParaRPr lang="en-US" sz="1050" dirty="0"/>
+          </a:p>
+        </p:txBody>
+      </p:sp>
+      <p:sp>
+        <p:nvSpPr>
+          <p:cNvPr id="20" name="Shape 18"/>
+          <p:cNvSpPr/>
+          <p:nvPr/>
+        </p:nvSpPr>
+        <p:spPr>
+          <a:xfrm>
+            <a:off x="6675120" y="2880360"/>
+            <a:ext cx="2743200" cy="310896"/>
+          </a:xfrm>
+          <a:prstGeom prst="roundRect">
+            <a:avLst>
+              <a:gd name="adj" fmla="val 23529"/>
+            </a:avLst>
+          </a:prstGeom>
+          <a:solidFill>
+            <a:srgbClr val="FFF4DF"/>
+          </a:solidFill>
+          <a:ln w="12700">
+            <a:solidFill>
+              <a:srgbClr val="FFF4DF"/>
+            </a:solidFill>
+            <a:prstDash val="solid"/>
+          </a:ln>
+        </p:spPr>
+      </p:sp>
+      <p:sp>
+        <p:nvSpPr>
+          <p:cNvPr id="21" name="Text 19"/>
+          <p:cNvSpPr/>
+          <p:nvPr/>
+        </p:nvSpPr>
+        <p:spPr>
+          <a:xfrm>
+            <a:off x="6766560" y="2944368"/>
+            <a:ext cx="2560320" cy="146304"/>
+          </a:xfrm>
+          <a:prstGeom prst="rect">
+            <a:avLst/>
+          </a:prstGeom>
+          <a:noFill/>
+          <a:ln/>
+        </p:spPr>
+        <p:txBody>
+          <a:bodyPr wrap="square" lIns="0" tIns="0" rIns="0" bIns="0" rtlCol="0" anchor="ctr"/>
+          <a:lstStyle/>
+          <a:p>
+            <a:pPr marL="0" indent="0" algn="ctr">
+              <a:buNone/>
+            </a:pPr>
+            <a:r>
+              <a:rPr lang="en-US" sz="1050" b="1" dirty="0">
+                <a:solidFill>
+                  <a:srgbClr val="0B5D3B"/>
+                </a:solidFill>
+                <a:latin typeface="Aptos" pitchFamily="34" charset="0"/>
+                <a:ea typeface="Aptos" pitchFamily="34" charset="-122"/>
+                <a:cs typeface="Aptos" pitchFamily="34" charset="-120"/>
+              </a:rPr>
+              <a:t>17,415 NDVI </a:t>
+            </a:r>
+            <a:r>
+              <a:rPr lang="en-US" sz="1050" b="1" dirty="0" err="1">
+                <a:solidFill>
+                  <a:srgbClr val="0B5D3B"/>
+                </a:solidFill>
+                <a:latin typeface="Aptos" pitchFamily="34" charset="0"/>
+                <a:ea typeface="Aptos" pitchFamily="34" charset="-122"/>
+                <a:cs typeface="Aptos" pitchFamily="34" charset="-120"/>
+              </a:rPr>
+              <a:t>GeoTIFF</a:t>
+            </a:r>
+            <a:r>
+              <a:rPr lang="en-US" sz="1050" b="1" dirty="0">
+                <a:solidFill>
+                  <a:srgbClr val="0B5D3B"/>
+                </a:solidFill>
+                <a:latin typeface="Aptos" pitchFamily="34" charset="0"/>
+                <a:ea typeface="Aptos" pitchFamily="34" charset="-122"/>
+                <a:cs typeface="Aptos" pitchFamily="34" charset="-120"/>
+              </a:rPr>
+              <a:t> items</a:t>
+            </a:r>
+            <a:endParaRPr lang="en-US" sz="1050" dirty="0"/>
+          </a:p>
+        </p:txBody>
+      </p:sp>
+      <p:sp>
+        <p:nvSpPr>
+          <p:cNvPr id="24" name="Text 22"/>
+          <p:cNvSpPr/>
+          <p:nvPr/>
+        </p:nvSpPr>
+        <p:spPr>
+          <a:xfrm>
+            <a:off x="6629400" y="4343400"/>
+            <a:ext cx="4389120" cy="548640"/>
+          </a:xfrm>
+          <a:prstGeom prst="rect">
+            <a:avLst/>
+          </a:prstGeom>
+          <a:noFill/>
+          <a:ln/>
+        </p:spPr>
+        <p:txBody>
+          <a:bodyPr wrap="square" lIns="254" tIns="254" rIns="254" bIns="254" rtlCol="0" anchor="ctr">
+            <a:normAutofit fontScale="77500" lnSpcReduction="20000"/>
+          </a:bodyPr>
+          <a:lstStyle/>
+          <a:p>
+            <a:pPr marL="0" indent="0">
+              <a:buNone/>
+            </a:pPr>
+            <a:r>
+              <a:rPr lang="en-US" sz="2200" b="1" dirty="0">
+                <a:solidFill>
+                  <a:srgbClr val="0B5D3B"/>
+                </a:solidFill>
+              </a:rPr>
+              <a:t>The pilot established correctness; the queue-worker design established scalability.</a:t>
+            </a:r>
+            <a:endParaRPr lang="en-US" sz="2200" dirty="0"/>
+          </a:p>
+        </p:txBody>
+      </p:sp>
+      <p:sp>
+        <p:nvSpPr>
+          <p:cNvPr id="26" name="Text 24"/>
+          <p:cNvSpPr/>
+          <p:nvPr/>
+        </p:nvSpPr>
+        <p:spPr>
+          <a:xfrm>
+            <a:off x="9601200" y="6510528"/>
+            <a:ext cx="2103120" cy="164592"/>
+          </a:xfrm>
+          <a:prstGeom prst="rect">
+            <a:avLst/>
+          </a:prstGeom>
+          <a:noFill/>
+          <a:ln/>
+        </p:spPr>
+        <p:txBody>
+          <a:bodyPr wrap="square" lIns="0" tIns="0" rIns="0" bIns="0" rtlCol="0" anchor="ctr"/>
+          <a:lstStyle/>
+          <a:p>
+            <a:pPr marL="0" indent="0" algn="r">
+              <a:buNone/>
+            </a:pPr>
+            <a:r>
+              <a:rPr lang="en-US" sz="800" dirty="0">
+                <a:solidFill>
+                  <a:srgbClr val="7A8880"/>
+                </a:solidFill>
+                <a:latin typeface="Aptos" pitchFamily="34" charset="0"/>
+                <a:ea typeface="Aptos" pitchFamily="34" charset="-122"/>
+                <a:cs typeface="Aptos" pitchFamily="34" charset="-120"/>
+              </a:rPr>
+              <a:t>Final project presentation  ·  5</a:t>
+            </a:r>
+            <a:endParaRPr lang="en-US" sz="800" dirty="0"/>
+          </a:p>
+        </p:txBody>
+      </p:sp>
+      <p:sp>
+        <p:nvSpPr>
+          <p:cNvPr id="27" name="Shape 10">
+            <a:extLst>
+              <a:ext uri="{FF2B5EF4-FFF2-40B4-BE49-F238E27FC236}">
+                <a16:creationId xmlns:a16="http://schemas.microsoft.com/office/drawing/2014/main" id="{7858B784-5ED0-6084-E0C5-7666A5211260}"/>
+              </a:ext>
+            </a:extLst>
+          </p:cNvPr>
+          <p:cNvSpPr/>
+          <p:nvPr/>
+        </p:nvSpPr>
+        <p:spPr>
+          <a:xfrm>
+            <a:off x="598713" y="3973938"/>
             <a:ext cx="91440" cy="91440"/>
           </a:xfrm>
           <a:prstGeom prst="ellipse">
@@ -4510,483 +5444,6 @@
             <a:prstDash val="solid"/>
           </a:ln>
         </p:spPr>
-      </p:sp>
-      <p:sp>
-        <p:nvSpPr>
-          <p:cNvPr id="13" name="Text 11"/>
-          <p:cNvSpPr/>
-          <p:nvPr/>
-        </p:nvSpPr>
-        <p:spPr>
-          <a:xfrm>
-            <a:off x="914400" y="3328416"/>
-            <a:ext cx="5303520" cy="384048"/>
-          </a:xfrm>
-          <a:prstGeom prst="rect">
-            <a:avLst/>
-          </a:prstGeom>
-          <a:noFill/>
-          <a:ln/>
-        </p:spPr>
-        <p:txBody>
-          <a:bodyPr wrap="square" lIns="254" tIns="254" rIns="254" bIns="254" rtlCol="0" anchor="ctr">
-            <a:normAutofit fontScale="92500"/>
-          </a:bodyPr>
-          <a:lstStyle/>
-          <a:p>
-            <a:pPr marL="0" indent="0">
-              <a:buNone/>
-            </a:pPr>
-            <a:r>
-              <a:rPr lang="en-US" sz="1650" dirty="0">
-                <a:solidFill>
-                  <a:srgbClr val="0F2F25"/>
-                </a:solidFill>
-                <a:latin typeface="Aptos" pitchFamily="34" charset="0"/>
-                <a:ea typeface="Aptos" pitchFamily="34" charset="-122"/>
-                <a:cs typeface="Aptos" pitchFamily="34" charset="-120"/>
-              </a:rPr>
-              <a:t>Fix hidden CRLF manifest issue and verify S3 upload of outputs</a:t>
-            </a:r>
-            <a:endParaRPr lang="en-US" sz="1650" dirty="0"/>
-          </a:p>
-        </p:txBody>
-      </p:sp>
-      <p:sp>
-        <p:nvSpPr>
-          <p:cNvPr id="14" name="Shape 12"/>
-          <p:cNvSpPr/>
-          <p:nvPr/>
-        </p:nvSpPr>
-        <p:spPr>
-          <a:xfrm>
-            <a:off x="6172200" y="1188720"/>
-            <a:ext cx="0" cy="4526280"/>
-          </a:xfrm>
-          <a:prstGeom prst="line">
-            <a:avLst/>
-          </a:prstGeom>
-          <a:noFill/>
-          <a:ln w="13970">
-            <a:solidFill>
-              <a:srgbClr val="B5C4BB"/>
-            </a:solidFill>
-            <a:prstDash val="solid"/>
-          </a:ln>
-        </p:spPr>
-      </p:sp>
-      <p:sp>
-        <p:nvSpPr>
-          <p:cNvPr id="15" name="Text 13"/>
-          <p:cNvSpPr/>
-          <p:nvPr/>
-        </p:nvSpPr>
-        <p:spPr>
-          <a:xfrm>
-            <a:off x="6629400" y="1234440"/>
-            <a:ext cx="3931920" cy="274320"/>
-          </a:xfrm>
-          <a:prstGeom prst="rect">
-            <a:avLst/>
-          </a:prstGeom>
-          <a:noFill/>
-          <a:ln/>
-        </p:spPr>
-        <p:txBody>
-          <a:bodyPr wrap="square" lIns="0" tIns="0" rIns="0" bIns="0" rtlCol="0" anchor="ctr"/>
-          <a:lstStyle/>
-          <a:p>
-            <a:pPr marL="0" indent="0">
-              <a:buNone/>
-            </a:pPr>
-            <a:r>
-              <a:rPr lang="en-US" sz="2000" b="1" dirty="0">
-                <a:solidFill>
-                  <a:srgbClr val="0F2F25"/>
-                </a:solidFill>
-              </a:rPr>
-              <a:t>Full pipeline scale-up</a:t>
-            </a:r>
-            <a:endParaRPr lang="en-US" sz="2000" dirty="0"/>
-          </a:p>
-        </p:txBody>
-      </p:sp>
-      <p:sp>
-        <p:nvSpPr>
-          <p:cNvPr id="16" name="Shape 14"/>
-          <p:cNvSpPr/>
-          <p:nvPr/>
-        </p:nvSpPr>
-        <p:spPr>
-          <a:xfrm>
-            <a:off x="6675120" y="1783080"/>
-            <a:ext cx="2926080" cy="310896"/>
-          </a:xfrm>
-          <a:prstGeom prst="roundRect">
-            <a:avLst>
-              <a:gd name="adj" fmla="val 23529"/>
-            </a:avLst>
-          </a:prstGeom>
-          <a:solidFill>
-            <a:srgbClr val="E6F0FA"/>
-          </a:solidFill>
-          <a:ln w="12700">
-            <a:solidFill>
-              <a:srgbClr val="E6F0FA"/>
-            </a:solidFill>
-            <a:prstDash val="solid"/>
-          </a:ln>
-        </p:spPr>
-      </p:sp>
-      <p:sp>
-        <p:nvSpPr>
-          <p:cNvPr id="17" name="Text 15"/>
-          <p:cNvSpPr/>
-          <p:nvPr/>
-        </p:nvSpPr>
-        <p:spPr>
-          <a:xfrm>
-            <a:off x="6766560" y="1847088"/>
-            <a:ext cx="2743200" cy="146304"/>
-          </a:xfrm>
-          <a:prstGeom prst="rect">
-            <a:avLst/>
-          </a:prstGeom>
-          <a:noFill/>
-          <a:ln/>
-        </p:spPr>
-        <p:txBody>
-          <a:bodyPr wrap="square" lIns="0" tIns="0" rIns="0" bIns="0" rtlCol="0" anchor="ctr"/>
-          <a:lstStyle/>
-          <a:p>
-            <a:pPr marL="0" indent="0" algn="ctr">
-              <a:buNone/>
-            </a:pPr>
-            <a:r>
-              <a:rPr lang="en-US" sz="1050" b="1" dirty="0">
-                <a:solidFill>
-                  <a:srgbClr val="0B5D3B"/>
-                </a:solidFill>
-                <a:latin typeface="Aptos" pitchFamily="34" charset="0"/>
-                <a:ea typeface="Aptos" pitchFamily="34" charset="-122"/>
-                <a:cs typeface="Aptos" pitchFamily="34" charset="-120"/>
-              </a:rPr>
-              <a:t>28 provinces with NDVI outputs</a:t>
-            </a:r>
-            <a:endParaRPr lang="en-US" sz="1050" dirty="0"/>
-          </a:p>
-        </p:txBody>
-      </p:sp>
-      <p:sp>
-        <p:nvSpPr>
-          <p:cNvPr id="18" name="Shape 16"/>
-          <p:cNvSpPr/>
-          <p:nvPr/>
-        </p:nvSpPr>
-        <p:spPr>
-          <a:xfrm>
-            <a:off x="6675120" y="2331720"/>
-            <a:ext cx="3200400" cy="310896"/>
-          </a:xfrm>
-          <a:prstGeom prst="roundRect">
-            <a:avLst>
-              <a:gd name="adj" fmla="val 23529"/>
-            </a:avLst>
-          </a:prstGeom>
-          <a:solidFill>
-            <a:srgbClr val="DCEEE5"/>
-          </a:solidFill>
-          <a:ln w="12700">
-            <a:solidFill>
-              <a:srgbClr val="DCEEE5"/>
-            </a:solidFill>
-            <a:prstDash val="solid"/>
-          </a:ln>
-        </p:spPr>
-      </p:sp>
-      <p:sp>
-        <p:nvSpPr>
-          <p:cNvPr id="19" name="Text 17"/>
-          <p:cNvSpPr/>
-          <p:nvPr/>
-        </p:nvSpPr>
-        <p:spPr>
-          <a:xfrm>
-            <a:off x="6766560" y="2395728"/>
-            <a:ext cx="3017520" cy="146304"/>
-          </a:xfrm>
-          <a:prstGeom prst="rect">
-            <a:avLst/>
-          </a:prstGeom>
-          <a:noFill/>
-          <a:ln/>
-        </p:spPr>
-        <p:txBody>
-          <a:bodyPr wrap="square" lIns="0" tIns="0" rIns="0" bIns="0" rtlCol="0" anchor="ctr"/>
-          <a:lstStyle/>
-          <a:p>
-            <a:pPr marL="0" indent="0" algn="ctr">
-              <a:buNone/>
-            </a:pPr>
-            <a:r>
-              <a:rPr lang="en-US" sz="1050" b="1" dirty="0">
-                <a:solidFill>
-                  <a:srgbClr val="0B5D3B"/>
-                </a:solidFill>
-                <a:latin typeface="Aptos" pitchFamily="34" charset="0"/>
-                <a:ea typeface="Aptos" pitchFamily="34" charset="-122"/>
-                <a:cs typeface="Aptos" pitchFamily="34" charset="-120"/>
-              </a:rPr>
-              <a:t>11,061 CGSS observations merged</a:t>
-            </a:r>
-            <a:endParaRPr lang="en-US" sz="1050" dirty="0"/>
-          </a:p>
-        </p:txBody>
-      </p:sp>
-      <p:sp>
-        <p:nvSpPr>
-          <p:cNvPr id="20" name="Shape 18"/>
-          <p:cNvSpPr/>
-          <p:nvPr/>
-        </p:nvSpPr>
-        <p:spPr>
-          <a:xfrm>
-            <a:off x="6675120" y="2880360"/>
-            <a:ext cx="2743200" cy="310896"/>
-          </a:xfrm>
-          <a:prstGeom prst="roundRect">
-            <a:avLst>
-              <a:gd name="adj" fmla="val 23529"/>
-            </a:avLst>
-          </a:prstGeom>
-          <a:solidFill>
-            <a:srgbClr val="FFF4DF"/>
-          </a:solidFill>
-          <a:ln w="12700">
-            <a:solidFill>
-              <a:srgbClr val="FFF4DF"/>
-            </a:solidFill>
-            <a:prstDash val="solid"/>
-          </a:ln>
-        </p:spPr>
-      </p:sp>
-      <p:sp>
-        <p:nvSpPr>
-          <p:cNvPr id="21" name="Text 19"/>
-          <p:cNvSpPr/>
-          <p:nvPr/>
-        </p:nvSpPr>
-        <p:spPr>
-          <a:xfrm>
-            <a:off x="6766560" y="2944368"/>
-            <a:ext cx="2560320" cy="146304"/>
-          </a:xfrm>
-          <a:prstGeom prst="rect">
-            <a:avLst/>
-          </a:prstGeom>
-          <a:noFill/>
-          <a:ln/>
-        </p:spPr>
-        <p:txBody>
-          <a:bodyPr wrap="square" lIns="0" tIns="0" rIns="0" bIns="0" rtlCol="0" anchor="ctr"/>
-          <a:lstStyle/>
-          <a:p>
-            <a:pPr marL="0" indent="0" algn="ctr">
-              <a:buNone/>
-            </a:pPr>
-            <a:r>
-              <a:rPr lang="en-US" sz="1050" b="1" dirty="0">
-                <a:solidFill>
-                  <a:srgbClr val="0B5D3B"/>
-                </a:solidFill>
-                <a:latin typeface="Aptos" pitchFamily="34" charset="0"/>
-                <a:ea typeface="Aptos" pitchFamily="34" charset="-122"/>
-                <a:cs typeface="Aptos" pitchFamily="34" charset="-120"/>
-              </a:rPr>
-              <a:t>SQS queue + EC2 workers</a:t>
-            </a:r>
-            <a:endParaRPr lang="en-US" sz="1050" dirty="0"/>
-          </a:p>
-        </p:txBody>
-      </p:sp>
-      <p:sp>
-        <p:nvSpPr>
-          <p:cNvPr id="22" name="Shape 20"/>
-          <p:cNvSpPr/>
-          <p:nvPr/>
-        </p:nvSpPr>
-        <p:spPr>
-          <a:xfrm>
-            <a:off x="6675120" y="3429000"/>
-            <a:ext cx="2926080" cy="310896"/>
-          </a:xfrm>
-          <a:prstGeom prst="roundRect">
-            <a:avLst>
-              <a:gd name="adj" fmla="val 23529"/>
-            </a:avLst>
-          </a:prstGeom>
-          <a:solidFill>
-            <a:srgbClr val="F4E8FF"/>
-          </a:solidFill>
-          <a:ln w="12700">
-            <a:solidFill>
-              <a:srgbClr val="F4E8FF"/>
-            </a:solidFill>
-            <a:prstDash val="solid"/>
-          </a:ln>
-        </p:spPr>
-      </p:sp>
-      <p:sp>
-        <p:nvSpPr>
-          <p:cNvPr id="23" name="Text 21"/>
-          <p:cNvSpPr/>
-          <p:nvPr/>
-        </p:nvSpPr>
-        <p:spPr>
-          <a:xfrm>
-            <a:off x="6766560" y="3493008"/>
-            <a:ext cx="2743200" cy="146304"/>
-          </a:xfrm>
-          <a:prstGeom prst="rect">
-            <a:avLst/>
-          </a:prstGeom>
-          <a:noFill/>
-          <a:ln/>
-        </p:spPr>
-        <p:txBody>
-          <a:bodyPr wrap="square" lIns="0" tIns="0" rIns="0" bIns="0" rtlCol="0" anchor="ctr"/>
-          <a:lstStyle/>
-          <a:p>
-            <a:pPr marL="0" indent="0" algn="ctr">
-              <a:buNone/>
-            </a:pPr>
-            <a:r>
-              <a:rPr lang="en-US" sz="1050" b="1" dirty="0">
-                <a:solidFill>
-                  <a:srgbClr val="0B5D3B"/>
-                </a:solidFill>
-                <a:latin typeface="Aptos" pitchFamily="34" charset="0"/>
-                <a:ea typeface="Aptos" pitchFamily="34" charset="-122"/>
-                <a:cs typeface="Aptos" pitchFamily="34" charset="-120"/>
-              </a:rPr>
-              <a:t>EMR Spark regression stage</a:t>
-            </a:r>
-            <a:endParaRPr lang="en-US" sz="1050" dirty="0"/>
-          </a:p>
-        </p:txBody>
-      </p:sp>
-      <p:sp>
-        <p:nvSpPr>
-          <p:cNvPr id="24" name="Text 22"/>
-          <p:cNvSpPr/>
-          <p:nvPr/>
-        </p:nvSpPr>
-        <p:spPr>
-          <a:xfrm>
-            <a:off x="6629400" y="4343400"/>
-            <a:ext cx="4389120" cy="548640"/>
-          </a:xfrm>
-          <a:prstGeom prst="rect">
-            <a:avLst/>
-          </a:prstGeom>
-          <a:noFill/>
-          <a:ln/>
-        </p:spPr>
-        <p:txBody>
-          <a:bodyPr wrap="square" lIns="254" tIns="254" rIns="254" bIns="254" rtlCol="0" anchor="ctr">
-            <a:normAutofit fontScale="77500" lnSpcReduction="20000"/>
-          </a:bodyPr>
-          <a:lstStyle/>
-          <a:p>
-            <a:pPr marL="0" indent="0">
-              <a:buNone/>
-            </a:pPr>
-            <a:r>
-              <a:rPr lang="en-US" sz="2200" b="1" dirty="0">
-                <a:solidFill>
-                  <a:srgbClr val="0B5D3B"/>
-                </a:solidFill>
-              </a:rPr>
-              <a:t>The pilot established correctness; the queue-worker design established scalability.</a:t>
-            </a:r>
-            <a:endParaRPr lang="en-US" sz="2200" dirty="0"/>
-          </a:p>
-        </p:txBody>
-      </p:sp>
-      <p:sp>
-        <p:nvSpPr>
-          <p:cNvPr id="25" name="Text 23"/>
-          <p:cNvSpPr/>
-          <p:nvPr/>
-        </p:nvSpPr>
-        <p:spPr>
-          <a:xfrm>
-            <a:off x="6629400" y="5166360"/>
-            <a:ext cx="4343400" cy="384048"/>
-          </a:xfrm>
-          <a:prstGeom prst="rect">
-            <a:avLst/>
-          </a:prstGeom>
-          <a:noFill/>
-          <a:ln/>
-        </p:spPr>
-        <p:txBody>
-          <a:bodyPr wrap="square" lIns="254" tIns="254" rIns="254" bIns="254" rtlCol="0" anchor="ctr"/>
-          <a:lstStyle/>
-          <a:p>
-            <a:pPr marL="0" indent="0">
-              <a:buNone/>
-            </a:pPr>
-            <a:r>
-              <a:rPr lang="en-US" sz="1600" dirty="0">
-                <a:solidFill>
-                  <a:srgbClr val="5B6770"/>
-                </a:solidFill>
-              </a:rPr>
-              <a:t>The same code path was used for test and full run, reducing one-off manual steps.</a:t>
-            </a:r>
-            <a:endParaRPr lang="en-US" sz="1600" dirty="0"/>
-          </a:p>
-        </p:txBody>
-      </p:sp>
-      <p:sp>
-        <p:nvSpPr>
-          <p:cNvPr id="26" name="Text 24"/>
-          <p:cNvSpPr/>
-          <p:nvPr/>
-        </p:nvSpPr>
-        <p:spPr>
-          <a:xfrm>
-            <a:off x="9601200" y="6510528"/>
-            <a:ext cx="2103120" cy="164592"/>
-          </a:xfrm>
-          <a:prstGeom prst="rect">
-            <a:avLst/>
-          </a:prstGeom>
-          <a:noFill/>
-          <a:ln/>
-        </p:spPr>
-        <p:txBody>
-          <a:bodyPr wrap="square" lIns="0" tIns="0" rIns="0" bIns="0" rtlCol="0" anchor="ctr"/>
-          <a:lstStyle/>
-          <a:p>
-            <a:pPr marL="0" indent="0" algn="r">
-              <a:buNone/>
-            </a:pPr>
-            <a:r>
-              <a:rPr lang="en-US" sz="800" dirty="0">
-                <a:solidFill>
-                  <a:srgbClr val="7A8880"/>
-                </a:solidFill>
-                <a:latin typeface="Aptos" pitchFamily="34" charset="0"/>
-                <a:ea typeface="Aptos" pitchFamily="34" charset="-122"/>
-                <a:cs typeface="Aptos" pitchFamily="34" charset="-120"/>
-              </a:rPr>
-              <a:t>Final project presentation  ·  5</a:t>
-            </a:r>
-            <a:endParaRPr lang="en-US" sz="800" dirty="0"/>
-          </a:p>
-        </p:txBody>
       </p:sp>
     </p:spTree>
   </p:cSld>
